--- a/courses/03-introduction-to-machine-learning/14-model-evaluation-strategies/ITPU-ML-Topics-3-4.pptx
+++ b/courses/03-introduction-to-machine-learning/14-model-evaluation-strategies/ITPU-ML-Topics-3-4.pptx
@@ -4,6 +4,9 @@
   <p:sldMasterIdLst>
     <p:sldMasterId id="2147483648" r:id="rId1"/>
   </p:sldMasterIdLst>
+  <p:notesMasterIdLst>
+    <p:notesMasterId r:id="rId21"/>
+  </p:notesMasterIdLst>
   <p:sldIdLst>
     <p:sldId id="256" r:id="rId2"/>
     <p:sldId id="257" r:id="rId3"/>
@@ -25,9 +28,6 @@
     <p:sldId id="273" r:id="rId19"/>
     <p:sldId id="274" r:id="rId20"/>
   </p:sldIdLst>
-  <p:notesMasterIdLst>
-    <p:notesMasterId r:id="rId21"/>
-  </p:notesMasterIdLst>
   <p:sldSz cx="12192000" cy="6858000"/>
   <p:notesSz cx="6858000" cy="12192000"/>
   <p:defaultTextStyle>
@@ -122,6 +122,11 @@
       </a:defRPr>
     </a:lvl9pPr>
   </p:defaultTextStyle>
+  <p:extLst>
+    <p:ext uri="{EFAFB233-063F-42B5-8137-9DF3F51BA10A}">
+      <p15:sldGuideLst xmlns:p15="http://schemas.microsoft.com/office/powerpoint/2012/main"/>
+    </p:ext>
+  </p:extLst>
 </p:presentation>
 </file>
 
@@ -147,234 +152,10 @@
           <a:chExt cx="0" cy="0"/>
         </a:xfrm>
       </p:grpSpPr>
-      <p:sp>
-        <p:nvSpPr>
-          <p:cNvPr id="2" name="Header Placeholder 1"/>
-          <p:cNvSpPr>
-            <a:spLocks noGrp="1"/>
-          </p:cNvSpPr>
-          <p:nvPr>
-            <p:ph type="hdr" sz="quarter"/>
-          </p:nvPr>
-        </p:nvSpPr>
-        <p:spPr>
-          <a:xfrm>
-            <a:off x="0" y="0"/>
-            <a:ext cx="2971800" cy="458788"/>
-          </a:xfrm>
-          <a:prstGeom prst="rect">
-            <a:avLst/>
-          </a:prstGeom>
-        </p:spPr>
-        <p:txBody>
-          <a:bodyPr vert="horz" lIns="91440" tIns="45720" rIns="91440" bIns="45720" rtlCol="0"/>
-          <a:lstStyle>
-            <a:lvl1pPr algn="l">
-              <a:defRPr sz="1200"/>
-            </a:lvl1pPr>
-          </a:lstStyle>
-          <a:p>
-            <a:endParaRPr lang="en-US"/>
-          </a:p>
-        </p:txBody>
-      </p:sp>
-      <p:sp>
-        <p:nvSpPr>
-          <p:cNvPr id="3" name="Date Placeholder 2"/>
-          <p:cNvSpPr>
-            <a:spLocks noGrp="1"/>
-          </p:cNvSpPr>
-          <p:nvPr>
-            <p:ph type="dt" idx="1"/>
-          </p:nvPr>
-        </p:nvSpPr>
-        <p:spPr>
-          <a:xfrm>
-            <a:off x="3884613" y="0"/>
-            <a:ext cx="2971800" cy="458788"/>
-          </a:xfrm>
-          <a:prstGeom prst="rect">
-            <a:avLst/>
-          </a:prstGeom>
-        </p:spPr>
-        <p:txBody>
-          <a:bodyPr vert="horz" lIns="91440" tIns="45720" rIns="91440" bIns="45720" rtlCol="0"/>
-          <a:lstStyle>
-            <a:lvl1pPr algn="r">
-              <a:defRPr sz="1200"/>
-            </a:lvl1pPr>
-          </a:lstStyle>
-          <a:p>
-            <a:fld id="{5282F153-3F37-0F45-9E97-73ACFA13230C}" type="datetimeFigureOut">
-              <a:rPr lang="en-US"/>
-              <a:t>7/23/19</a:t>
-            </a:fld>
-            <a:endParaRPr lang="en-US"/>
-          </a:p>
-        </p:txBody>
-      </p:sp>
-      <p:sp>
-        <p:nvSpPr>
-          <p:cNvPr id="4" name="Slide Image Placeholder 3"/>
-          <p:cNvSpPr>
-            <a:spLocks noGrp="1" noRot="1" noChangeAspect="1"/>
-          </p:cNvSpPr>
-          <p:nvPr>
-            <p:ph type="sldImg" idx="2"/>
-          </p:nvPr>
-        </p:nvSpPr>
-        <p:spPr>
-          <a:xfrm>
-            <a:off x="685800" y="1143000"/>
-            <a:ext cx="5486400" cy="3086100"/>
-          </a:xfrm>
-          <a:prstGeom prst="rect">
-            <a:avLst/>
-          </a:prstGeom>
-          <a:noFill/>
-          <a:ln w="12700">
-            <a:solidFill>
-              <a:prstClr val="black"/>
-            </a:solidFill>
-          </a:ln>
-        </p:spPr>
-        <p:txBody>
-          <a:bodyPr vert="horz" lIns="91440" tIns="45720" rIns="91440" bIns="45720" rtlCol="0" anchor="ctr"/>
-          <a:lstStyle/>
-          <a:p>
-            <a:endParaRPr lang="en-US"/>
-          </a:p>
-        </p:txBody>
-      </p:sp>
-      <p:sp>
-        <p:nvSpPr>
-          <p:cNvPr id="5" name="Notes Placeholder 4"/>
-          <p:cNvSpPr>
-            <a:spLocks noGrp="1"/>
-          </p:cNvSpPr>
-          <p:nvPr>
-            <p:ph type="body" sz="quarter" idx="3"/>
-          </p:nvPr>
-        </p:nvSpPr>
-        <p:spPr>
-          <a:xfrm>
-            <a:off x="685800" y="4400550"/>
-            <a:ext cx="5486400" cy="3600450"/>
-          </a:xfrm>
-          <a:prstGeom prst="rect">
-            <a:avLst/>
-          </a:prstGeom>
-        </p:spPr>
-        <p:txBody>
-          <a:bodyPr vert="horz" lIns="91440" tIns="45720" rIns="91440" bIns="45720" rtlCol="0"/>
-          <a:lstStyle/>
-          <a:p>
-            <a:pPr lvl="0"/>
-            <a:r>
-              <a:rPr lang="en-US"/>
-              <a:t>Click to edit Master text styles</a:t>
-            </a:r>
-          </a:p>
-          <a:p>
-            <a:pPr lvl="1"/>
-            <a:r>
-              <a:rPr lang="en-US"/>
-              <a:t>Second level</a:t>
-            </a:r>
-          </a:p>
-          <a:p>
-            <a:pPr lvl="2"/>
-            <a:r>
-              <a:rPr lang="en-US"/>
-              <a:t>Third level</a:t>
-            </a:r>
-          </a:p>
-          <a:p>
-            <a:pPr lvl="3"/>
-            <a:r>
-              <a:rPr lang="en-US"/>
-              <a:t>Fourth level</a:t>
-            </a:r>
-          </a:p>
-          <a:p>
-            <a:pPr lvl="4"/>
-            <a:r>
-              <a:rPr lang="en-US"/>
-              <a:t>Fifth level</a:t>
-            </a:r>
-          </a:p>
-        </p:txBody>
-      </p:sp>
-      <p:sp>
-        <p:nvSpPr>
-          <p:cNvPr id="6" name="Footer Placeholder 5"/>
-          <p:cNvSpPr>
-            <a:spLocks noGrp="1"/>
-          </p:cNvSpPr>
-          <p:nvPr>
-            <p:ph type="ftr" sz="quarter" idx="4"/>
-          </p:nvPr>
-        </p:nvSpPr>
-        <p:spPr>
-          <a:xfrm>
-            <a:off x="0" y="8685213"/>
-            <a:ext cx="2971800" cy="458787"/>
-          </a:xfrm>
-          <a:prstGeom prst="rect">
-            <a:avLst/>
-          </a:prstGeom>
-        </p:spPr>
-        <p:txBody>
-          <a:bodyPr vert="horz" lIns="91440" tIns="45720" rIns="91440" bIns="45720" rtlCol="0" anchor="b"/>
-          <a:lstStyle>
-            <a:lvl1pPr algn="l">
-              <a:defRPr sz="1200"/>
-            </a:lvl1pPr>
-          </a:lstStyle>
-          <a:p>
-            <a:endParaRPr lang="en-US"/>
-          </a:p>
-        </p:txBody>
-      </p:sp>
-      <p:sp>
-        <p:nvSpPr>
-          <p:cNvPr id="7" name="Slide Number Placeholder 6"/>
-          <p:cNvSpPr>
-            <a:spLocks noGrp="1"/>
-          </p:cNvSpPr>
-          <p:nvPr>
-            <p:ph type="sldNum" sz="quarter" idx="5"/>
-          </p:nvPr>
-        </p:nvSpPr>
-        <p:spPr>
-          <a:xfrm>
-            <a:off x="3884613" y="8685213"/>
-            <a:ext cx="2971800" cy="458787"/>
-          </a:xfrm>
-          <a:prstGeom prst="rect">
-            <a:avLst/>
-          </a:prstGeom>
-        </p:spPr>
-        <p:txBody>
-          <a:bodyPr vert="horz" lIns="91440" tIns="45720" rIns="91440" bIns="45720" rtlCol="0" anchor="b"/>
-          <a:lstStyle>
-            <a:lvl1pPr algn="r">
-              <a:defRPr sz="1200"/>
-            </a:lvl1pPr>
-          </a:lstStyle>
-          <a:p>
-            <a:fld id="{CE5E9CC1-C706-0F49-92D6-E571CC5EEA8F}" type="slidenum">
-              <a:rPr lang="en-US"/>
-              <a:t>‹#›</a:t>
-            </a:fld>
-            <a:endParaRPr lang="en-US"/>
-          </a:p>
-        </p:txBody>
-      </p:sp>
     </p:spTree>
     <p:extLst>
       <p:ext uri="{BB962C8B-B14F-4D97-AF65-F5344CB8AC3E}">
-        <p14:creationId xmlns:p14="http://schemas.microsoft.com/office/powerpoint/2010/main" val="1024086991"/>
+        <p14:creationId xmlns:p14="http://schemas.microsoft.com/office/powerpoint/2010/main" val="2535886790"/>
       </p:ext>
     </p:extLst>
   </p:cSld>
@@ -522,7 +303,6 @@
               <a:rPr lang="en-US" dirty="0"/>
               <a:t>Two topics, one 90-minute arc: first how a model learns and how we read it, then how we evaluate it properly.</a:t>
             </a:r>
-            <a:endParaRPr lang="en-US" dirty="0"/>
           </a:p>
         </p:txBody>
       </p:sp>
@@ -610,7 +390,6 @@
               <a:rPr lang="en-US" dirty="0"/>
               <a:t>Ask class green/red before each drag. Then show the real beeswarm in the notebook.</a:t>
             </a:r>
-            <a:endParaRPr lang="en-US" dirty="0"/>
           </a:p>
         </p:txBody>
       </p:sp>
@@ -698,7 +477,6 @@
               <a:rPr lang="en-US" dirty="0"/>
               <a:t>Outcomes: describe CV techniques; compute classification &amp; regression metrics.</a:t>
             </a:r>
-            <a:endParaRPr lang="en-US" dirty="0"/>
           </a:p>
         </p:txBody>
       </p:sp>
@@ -786,7 +564,6 @@
               <a:rPr lang="en-US" dirty="0"/>
               <a:t>The average over folds is what you report — not one lucky split.</a:t>
             </a:r>
-            <a:endParaRPr lang="en-US" dirty="0"/>
           </a:p>
         </p:txBody>
       </p:sp>
@@ -874,7 +651,6 @@
               <a:rPr lang="en-US" dirty="0"/>
               <a:t>Engaging Q: time-dependent? imbalanced? grouped? Ask before revealing each answer.</a:t>
             </a:r>
-            <a:endParaRPr lang="en-US" dirty="0"/>
           </a:p>
         </p:txBody>
       </p:sp>
@@ -962,7 +738,6 @@
               <a:rPr lang="en-US" dirty="0"/>
               <a:t>The classic pitfall. Show the expanding window; validation is always after training.</a:t>
             </a:r>
-            <a:endParaRPr lang="en-US" dirty="0"/>
           </a:p>
         </p:txBody>
       </p:sp>
@@ -1050,7 +825,6 @@
               <a:rPr lang="en-US" dirty="0"/>
               <a:t>Precision protects against false alarms; recall against misses. F1 needs both high.</a:t>
             </a:r>
-            <a:endParaRPr lang="en-US" dirty="0"/>
           </a:p>
         </p:txBody>
       </p:sp>
@@ -1138,7 +912,6 @@
               <a:rPr lang="en-US" dirty="0"/>
               <a:t>Ask students to place: self-driving car brake? → recall. This trade-off is the exam favourite.</a:t>
             </a:r>
-            <a:endParaRPr lang="en-US" dirty="0"/>
           </a:p>
         </p:txBody>
       </p:sp>
@@ -1226,7 +999,6 @@
               <a:rPr lang="en-US" dirty="0"/>
               <a:t>RMSE if big errors matter; MAE if outliers shouldn't dominate; R² for variance explained.</a:t>
             </a:r>
-            <a:endParaRPr lang="en-US" dirty="0"/>
           </a:p>
         </p:txBody>
       </p:sp>
@@ -1314,7 +1086,6 @@
               <a:rPr lang="en-US" dirty="0"/>
               <a:t>Breakout rooms code the blanks; self-check; then AutoCode unit tests grade them.</a:t>
             </a:r>
-            <a:endParaRPr lang="en-US" dirty="0"/>
           </a:p>
         </p:txBody>
       </p:sp>
@@ -1402,7 +1173,6 @@
               <a:rPr lang="en-US" dirty="0"/>
               <a:t>Recap by asking students to state each line. Exit ticket next.</a:t>
             </a:r>
-            <a:endParaRPr lang="en-US" dirty="0"/>
           </a:p>
         </p:txBody>
       </p:sp>
@@ -1490,7 +1260,6 @@
               <a:rPr lang="en-US" dirty="0"/>
               <a:t>Topics 3 and 4 flow together: learn &amp; interpret a model, then evaluate it rigorously.</a:t>
             </a:r>
-            <a:endParaRPr lang="en-US" dirty="0"/>
           </a:p>
         </p:txBody>
       </p:sp>
@@ -1578,7 +1347,6 @@
               <a:rPr lang="en-US" dirty="0"/>
               <a:t>Outcomes: describe training; explain over/underfitting; interpret models with SHAP.</a:t>
             </a:r>
-            <a:endParaRPr lang="en-US" dirty="0"/>
           </a:p>
         </p:txBody>
       </p:sp>
@@ -1666,7 +1434,6 @@
               <a:rPr lang="en-US" dirty="0"/>
               <a:t>Walk the pipeline, then the A→B→C loop. Training = adjust parameters to minimise loss.</a:t>
             </a:r>
-            <a:endParaRPr lang="en-US" dirty="0"/>
           </a:p>
         </p:txBody>
       </p:sp>
@@ -1754,7 +1521,6 @@
               <a:rPr lang="en-US" dirty="0"/>
               <a:t>Live: press Train step, watch loss fall. Crank the learning rate to show divergence.</a:t>
             </a:r>
-            <a:endParaRPr lang="en-US" dirty="0"/>
           </a:p>
         </p:txBody>
       </p:sp>
@@ -1842,7 +1608,6 @@
               <a:rPr lang="en-US" dirty="0"/>
               <a:t>The app and the code are the same four steps. Feature scaling keeps it stable.</a:t>
             </a:r>
-            <a:endParaRPr lang="en-US" dirty="0"/>
           </a:p>
         </p:txBody>
       </p:sp>
@@ -1930,7 +1695,6 @@
               <a:rPr lang="en-US" dirty="0"/>
               <a:t>Train score is vanity; test score is truth. The gap = overfitting.</a:t>
             </a:r>
-            <a:endParaRPr lang="en-US" dirty="0"/>
           </a:p>
         </p:txBody>
       </p:sp>
@@ -2018,7 +1782,6 @@
               <a:rPr lang="en-US" dirty="0"/>
               <a:t>Slide complexity underfit→good→overfit; test-error U-curve marks the sweet spot.</a:t>
             </a:r>
-            <a:endParaRPr lang="en-US" dirty="0"/>
           </a:p>
         </p:txBody>
       </p:sp>
@@ -2106,7 +1869,6 @@
               <a:rPr lang="en-US" dirty="0"/>
               <a:t>Restaurant bill = splitting the prediction fairly. Read: which features, direction, size.</a:t>
             </a:r>
-            <a:endParaRPr lang="en-US" dirty="0"/>
           </a:p>
         </p:txBody>
       </p:sp>
@@ -2179,6 +1941,11 @@
 <file path=ppt/slideMasters/slideMaster1.xml><?xml version="1.0" encoding="utf-8"?>
 <p:sldMaster xmlns:a="http://schemas.openxmlformats.org/drawingml/2006/main" xmlns:r="http://schemas.openxmlformats.org/officeDocument/2006/relationships" xmlns:p="http://schemas.openxmlformats.org/presentationml/2006/main">
   <p:cSld>
+    <p:bg>
+      <p:bgRef idx="1001">
+        <a:schemeClr val="bg1"/>
+      </p:bgRef>
+    </p:bg>
     <p:spTree>
       <p:nvGrpSpPr>
         <p:cNvPr id="1" name=""/>
@@ -2461,6 +2228,7 @@
         <a:solidFill>
           <a:srgbClr val="39C2D7"/>
         </a:solidFill>
+        <a:effectLst/>
       </p:bgPr>
     </p:bg>
     <p:spTree>
@@ -2523,14 +2291,14 @@
       </p:sp>
       <p:pic>
         <p:nvPicPr>
-          <p:cNvPr id="4" name="Image 0" descr="deckimg/itpu_logo.png">    </p:cNvPr>
+          <p:cNvPr id="4" name="Image 0" descr="deckimg/itpu_logo.png"/>
           <p:cNvPicPr>
             <a:picLocks noChangeAspect="1"/>
           </p:cNvPicPr>
           <p:nvPr/>
         </p:nvPicPr>
         <p:blipFill>
-          <a:blip r:embed="rId1"/>
+          <a:blip r:embed="rId3"/>
           <a:stretch>
             <a:fillRect/>
           </a:stretch>
@@ -2566,11 +2334,11 @@
           <a:bodyPr wrap="square" rtlCol="0" anchor="ctr"/>
           <a:lstStyle/>
           <a:p>
-            <a:pPr indent="0" marL="0">
-              <a:buNone/>
-            </a:pPr>
-            <a:r>
-              <a:rPr lang="en-US" sz="1400" b="1" spc="300" kern="0" dirty="0">
+            <a:pPr marL="0" indent="0">
+              <a:buNone/>
+            </a:pPr>
+            <a:r>
+              <a:rPr lang="en-US" sz="1400" b="1" kern="0" spc="300" dirty="0">
                 <a:solidFill>
                   <a:srgbClr val="263852"/>
                 </a:solidFill>
@@ -2605,7 +2373,7 @@
           <a:bodyPr wrap="square" rtlCol="0" anchor="ctr"/>
           <a:lstStyle/>
           <a:p>
-            <a:pPr indent="0" marL="0">
+            <a:pPr marL="0" indent="0">
               <a:buNone/>
             </a:pPr>
             <a:r>
@@ -2644,7 +2412,7 @@
           <a:bodyPr wrap="square" rtlCol="0" anchor="ctr"/>
           <a:lstStyle/>
           <a:p>
-            <a:pPr indent="0" marL="0">
+            <a:pPr marL="0" indent="0">
               <a:buNone/>
             </a:pPr>
             <a:r>
@@ -2683,7 +2451,7 @@
           <a:bodyPr wrap="square" rtlCol="0" anchor="ctr"/>
           <a:lstStyle/>
           <a:p>
-            <a:pPr indent="0" marL="0">
+            <a:pPr marL="0" indent="0">
               <a:buNone/>
             </a:pPr>
             <a:r>
@@ -2695,7 +2463,7 @@
                 <a:ea typeface="Calibri" pitchFamily="34" charset="-122"/>
                 <a:cs typeface="Calibri" pitchFamily="34" charset="-120"/>
               </a:rPr>
-              <a:t>2nd-year CS / IT  ·  Online live (MS Teams)  ·  Lecturer: Dilrabo Khidirova</a:t>
+              <a:t>Lecturer: Dilrabo Khidirova</a:t>
             </a:r>
             <a:endParaRPr lang="en-US" sz="1300" dirty="0"/>
           </a:p>
@@ -2717,6 +2485,7 @@
         <a:solidFill>
           <a:srgbClr val="FFFFFF"/>
         </a:solidFill>
+        <a:effectLst/>
       </p:bgPr>
     </p:bg>
     <p:spTree>
@@ -2794,11 +2563,11 @@
           <a:bodyPr wrap="square" rtlCol="0" anchor="ctr"/>
           <a:lstStyle/>
           <a:p>
-            <a:pPr indent="0" marL="0">
-              <a:buNone/>
-            </a:pPr>
-            <a:r>
-              <a:rPr lang="en-US" sz="1200" b="1" spc="200" kern="0" dirty="0">
+            <a:pPr marL="0" indent="0">
+              <a:buNone/>
+            </a:pPr>
+            <a:r>
+              <a:rPr lang="en-US" sz="1200" b="1" kern="0" spc="200" dirty="0">
                 <a:solidFill>
                   <a:srgbClr val="39C2D7"/>
                 </a:solidFill>
@@ -2833,7 +2602,7 @@
           <a:bodyPr wrap="square" rtlCol="0" anchor="ctr"/>
           <a:lstStyle/>
           <a:p>
-            <a:pPr indent="0" marL="0">
+            <a:pPr marL="0" indent="0">
               <a:buNone/>
             </a:pPr>
             <a:r>
@@ -2880,14 +2649,14 @@
       </p:sp>
       <p:pic>
         <p:nvPicPr>
-          <p:cNvPr id="7" name="Image 0" descr="deckimg/shapx.png">    </p:cNvPr>
+          <p:cNvPr id="7" name="Image 0" descr="deckimg/shapx.png"/>
           <p:cNvPicPr>
             <a:picLocks noChangeAspect="1"/>
           </p:cNvPicPr>
           <p:nvPr/>
         </p:nvPicPr>
         <p:blipFill>
-          <a:blip r:embed="rId1"/>
+          <a:blip r:embed="rId3"/>
           <a:stretch>
             <a:fillRect/>
           </a:stretch>
@@ -2950,7 +2719,7 @@
           <a:bodyPr wrap="square" rtlCol="0" anchor="ctr"/>
           <a:lstStyle/>
           <a:p>
-            <a:pPr indent="0" marL="0">
+            <a:pPr marL="0" indent="0">
               <a:buNone/>
             </a:pPr>
             <a:r>
@@ -2989,7 +2758,7 @@
           <a:bodyPr wrap="square" rtlCol="0" anchor="ctr"/>
           <a:lstStyle/>
           <a:p>
-            <a:pPr indent="0" marL="0">
+            <a:pPr marL="0" indent="0">
               <a:buNone/>
             </a:pPr>
             <a:r>
@@ -3028,7 +2797,7 @@
           <a:bodyPr wrap="square" rtlCol="0" anchor="ctr"/>
           <a:lstStyle/>
           <a:p>
-            <a:pPr indent="0" marL="0">
+            <a:pPr marL="0" indent="0">
               <a:buNone/>
             </a:pPr>
             <a:r>
@@ -3067,7 +2836,7 @@
           <a:bodyPr wrap="square" rtlCol="0" anchor="ctr"/>
           <a:lstStyle/>
           <a:p>
-            <a:pPr indent="0" marL="0">
+            <a:pPr marL="0" indent="0">
               <a:buNone/>
             </a:pPr>
             <a:r>
@@ -3106,7 +2875,7 @@
           <a:bodyPr wrap="square" rtlCol="0" anchor="ctr"/>
           <a:lstStyle/>
           <a:p>
-            <a:pPr indent="0" marL="0">
+            <a:pPr marL="0" indent="0">
               <a:buNone/>
             </a:pPr>
             <a:r>
@@ -3145,7 +2914,7 @@
           <a:bodyPr wrap="square" rtlCol="0" anchor="ctr"/>
           <a:lstStyle/>
           <a:p>
-            <a:pPr indent="0" marL="0">
+            <a:pPr marL="0" indent="0">
               <a:buNone/>
             </a:pPr>
             <a:r>
@@ -3184,7 +2953,7 @@
           <a:bodyPr wrap="square" rtlCol="0" anchor="ctr"/>
           <a:lstStyle/>
           <a:p>
-            <a:pPr indent="0" marL="0">
+            <a:pPr marL="0" indent="0">
               <a:buNone/>
             </a:pPr>
             <a:r>
@@ -3223,7 +2992,7 @@
           <a:bodyPr wrap="square" rtlCol="0" anchor="ctr"/>
           <a:lstStyle/>
           <a:p>
-            <a:pPr indent="0" marL="0">
+            <a:pPr marL="0" indent="0">
               <a:buNone/>
             </a:pPr>
             <a:r>
@@ -3243,14 +3012,14 @@
       </p:sp>
       <p:pic>
         <p:nvPicPr>
-          <p:cNvPr id="17" name="Image 1" descr="deckimg/itpu_logo.png">    </p:cNvPr>
+          <p:cNvPr id="17" name="Image 1" descr="deckimg/itpu_logo.png"/>
           <p:cNvPicPr>
             <a:picLocks noChangeAspect="1"/>
           </p:cNvPicPr>
           <p:nvPr/>
         </p:nvPicPr>
         <p:blipFill>
-          <a:blip r:embed="rId2"/>
+          <a:blip r:embed="rId4"/>
           <a:stretch>
             <a:fillRect/>
           </a:stretch>
@@ -3286,7 +3055,7 @@
           <a:bodyPr wrap="square" rtlCol="0" anchor="ctr"/>
           <a:lstStyle/>
           <a:p>
-            <a:pPr indent="0" marL="0">
+            <a:pPr marL="0" indent="0">
               <a:buNone/>
             </a:pPr>
             <a:r>
@@ -3325,7 +3094,7 @@
           <a:bodyPr wrap="square" rtlCol="0" anchor="ctr"/>
           <a:lstStyle/>
           <a:p>
-            <a:pPr algn="r" indent="0" marL="0">
+            <a:pPr marL="0" indent="0" algn="r">
               <a:buNone/>
             </a:pPr>
             <a:r>
@@ -3359,6 +3128,7 @@
         <a:solidFill>
           <a:srgbClr val="263852"/>
         </a:solidFill>
+        <a:effectLst/>
       </p:bgPr>
     </p:bg>
     <p:spTree>
@@ -3416,11 +3186,11 @@
           <a:bodyPr wrap="square" rtlCol="0" anchor="ctr"/>
           <a:lstStyle/>
           <a:p>
-            <a:pPr indent="0" marL="0">
-              <a:buNone/>
-            </a:pPr>
-            <a:r>
-              <a:rPr lang="en-US" sz="1600" b="1" spc="400" kern="0" dirty="0">
+            <a:pPr marL="0" indent="0">
+              <a:buNone/>
+            </a:pPr>
+            <a:r>
+              <a:rPr lang="en-US" sz="1600" b="1" kern="0" spc="400" dirty="0">
                 <a:solidFill>
                   <a:srgbClr val="CEDB56"/>
                 </a:solidFill>
@@ -3455,7 +3225,7 @@
           <a:bodyPr wrap="square" rtlCol="0" anchor="ctr"/>
           <a:lstStyle/>
           <a:p>
-            <a:pPr indent="0" marL="0">
+            <a:pPr marL="0" indent="0">
               <a:buNone/>
             </a:pPr>
             <a:r>
@@ -3494,7 +3264,7 @@
           <a:bodyPr wrap="square" rtlCol="0" anchor="ctr"/>
           <a:lstStyle/>
           <a:p>
-            <a:pPr indent="0" marL="0">
+            <a:pPr marL="0" indent="0">
               <a:buNone/>
             </a:pPr>
             <a:r>
@@ -3514,14 +3284,14 @@
       </p:sp>
       <p:pic>
         <p:nvPicPr>
-          <p:cNvPr id="6" name="Image 0" descr="deckimg/itpu_logo.png">    </p:cNvPr>
+          <p:cNvPr id="6" name="Image 0" descr="deckimg/itpu_logo.png"/>
           <p:cNvPicPr>
             <a:picLocks noChangeAspect="1"/>
           </p:cNvPicPr>
           <p:nvPr/>
         </p:nvPicPr>
         <p:blipFill>
-          <a:blip r:embed="rId1"/>
+          <a:blip r:embed="rId3"/>
           <a:stretch>
             <a:fillRect/>
           </a:stretch>
@@ -3552,6 +3322,7 @@
         <a:solidFill>
           <a:srgbClr val="FFFFFF"/>
         </a:solidFill>
+        <a:effectLst/>
       </p:bgPr>
     </p:bg>
     <p:spTree>
@@ -3629,11 +3400,11 @@
           <a:bodyPr wrap="square" rtlCol="0" anchor="ctr"/>
           <a:lstStyle/>
           <a:p>
-            <a:pPr indent="0" marL="0">
-              <a:buNone/>
-            </a:pPr>
-            <a:r>
-              <a:rPr lang="en-US" sz="1200" b="1" spc="200" kern="0" dirty="0">
+            <a:pPr marL="0" indent="0">
+              <a:buNone/>
+            </a:pPr>
+            <a:r>
+              <a:rPr lang="en-US" sz="1200" b="1" kern="0" spc="200" dirty="0">
                 <a:solidFill>
                   <a:srgbClr val="39C2D7"/>
                 </a:solidFill>
@@ -3668,7 +3439,7 @@
           <a:bodyPr wrap="square" rtlCol="0" anchor="ctr"/>
           <a:lstStyle/>
           <a:p>
-            <a:pPr indent="0" marL="0">
+            <a:pPr marL="0" indent="0">
               <a:buNone/>
             </a:pPr>
             <a:r>
@@ -3734,7 +3505,7 @@
           <a:bodyPr wrap="square" rtlCol="0" anchor="ctr"/>
           <a:lstStyle/>
           <a:p>
-            <a:pPr indent="0" marL="0">
+            <a:pPr marL="0" indent="0">
               <a:buNone/>
             </a:pPr>
             <a:r>
@@ -3773,7 +3544,7 @@
           <a:bodyPr wrap="square" rtlCol="0" anchor="ctr"/>
           <a:lstStyle/>
           <a:p>
-            <a:pPr indent="0" marL="0">
+            <a:pPr marL="0" indent="0">
               <a:buNone/>
             </a:pPr>
             <a:r>
@@ -3812,7 +3583,7 @@
           <a:bodyPr wrap="square" rtlCol="0" anchor="ctr"/>
           <a:lstStyle/>
           <a:p>
-            <a:pPr indent="0" marL="0">
+            <a:pPr marL="0" indent="0">
               <a:buNone/>
             </a:pPr>
             <a:r>
@@ -3878,7 +3649,7 @@
           <a:bodyPr wrap="square" rtlCol="0" anchor="ctr"/>
           <a:lstStyle/>
           <a:p>
-            <a:pPr indent="0" marL="0">
+            <a:pPr marL="0" indent="0">
               <a:buNone/>
             </a:pPr>
             <a:r>
@@ -3917,7 +3688,7 @@
           <a:bodyPr wrap="square" rtlCol="0" anchor="ctr"/>
           <a:lstStyle/>
           <a:p>
-            <a:pPr indent="0" marL="0">
+            <a:pPr marL="0" indent="0">
               <a:buNone/>
             </a:pPr>
             <a:r>
@@ -3956,7 +3727,7 @@
           <a:bodyPr wrap="square" rtlCol="0" anchor="ctr"/>
           <a:lstStyle/>
           <a:p>
-            <a:pPr indent="0" marL="0">
+            <a:pPr marL="0" indent="0">
               <a:buNone/>
             </a:pPr>
             <a:r>
@@ -3970,9 +3741,6 @@
               </a:rPr>
               <a:t>scores: </a:t>
             </a:r>
-            <a:pPr indent="0" marL="0">
-              <a:buNone/>
-            </a:pPr>
             <a:r>
               <a:rPr lang="en-US" sz="1300" b="1" dirty="0">
                 <a:solidFill>
@@ -4009,7 +3777,7 @@
           <a:bodyPr wrap="square" rtlCol="0" anchor="ctr"/>
           <a:lstStyle/>
           <a:p>
-            <a:pPr indent="0" marL="0">
+            <a:pPr marL="0" indent="0">
               <a:buNone/>
             </a:pPr>
             <a:r>
@@ -4029,14 +3797,14 @@
       </p:sp>
       <p:pic>
         <p:nvPicPr>
-          <p:cNvPr id="15" name="Image 0" descr="deckimg/itpu_logo.png">    </p:cNvPr>
+          <p:cNvPr id="15" name="Image 0" descr="deckimg/itpu_logo.png"/>
           <p:cNvPicPr>
             <a:picLocks noChangeAspect="1"/>
           </p:cNvPicPr>
           <p:nvPr/>
         </p:nvPicPr>
         <p:blipFill>
-          <a:blip r:embed="rId1"/>
+          <a:blip r:embed="rId3"/>
           <a:stretch>
             <a:fillRect/>
           </a:stretch>
@@ -4072,7 +3840,7 @@
           <a:bodyPr wrap="square" rtlCol="0" anchor="ctr"/>
           <a:lstStyle/>
           <a:p>
-            <a:pPr indent="0" marL="0">
+            <a:pPr marL="0" indent="0">
               <a:buNone/>
             </a:pPr>
             <a:r>
@@ -4111,7 +3879,7 @@
           <a:bodyPr wrap="square" rtlCol="0" anchor="ctr"/>
           <a:lstStyle/>
           <a:p>
-            <a:pPr algn="r" indent="0" marL="0">
+            <a:pPr marL="0" indent="0" algn="r">
               <a:buNone/>
             </a:pPr>
             <a:r>
@@ -4145,6 +3913,7 @@
         <a:solidFill>
           <a:srgbClr val="FFFFFF"/>
         </a:solidFill>
+        <a:effectLst/>
       </p:bgPr>
     </p:bg>
     <p:spTree>
@@ -4222,11 +3991,11 @@
           <a:bodyPr wrap="square" rtlCol="0" anchor="ctr"/>
           <a:lstStyle/>
           <a:p>
-            <a:pPr indent="0" marL="0">
-              <a:buNone/>
-            </a:pPr>
-            <a:r>
-              <a:rPr lang="en-US" sz="1200" b="1" spc="200" kern="0" dirty="0">
+            <a:pPr marL="0" indent="0">
+              <a:buNone/>
+            </a:pPr>
+            <a:r>
+              <a:rPr lang="en-US" sz="1200" b="1" kern="0" spc="200" dirty="0">
                 <a:solidFill>
                   <a:srgbClr val="39C2D7"/>
                 </a:solidFill>
@@ -4261,7 +4030,7 @@
           <a:bodyPr wrap="square" rtlCol="0" anchor="ctr"/>
           <a:lstStyle/>
           <a:p>
-            <a:pPr indent="0" marL="0">
+            <a:pPr marL="0" indent="0">
               <a:buNone/>
             </a:pPr>
             <a:r>
@@ -4308,14 +4077,14 @@
       </p:sp>
       <p:pic>
         <p:nvPicPr>
-          <p:cNvPr id="7" name="Image 0" descr="deckimg/cvfolds.png">    </p:cNvPr>
+          <p:cNvPr id="7" name="Image 0" descr="deckimg/cvfolds.png"/>
           <p:cNvPicPr>
             <a:picLocks noChangeAspect="1"/>
           </p:cNvPicPr>
           <p:nvPr/>
         </p:nvPicPr>
         <p:blipFill>
-          <a:blip r:embed="rId1"/>
+          <a:blip r:embed="rId3"/>
           <a:stretch>
             <a:fillRect/>
           </a:stretch>
@@ -4332,14 +4101,14 @@
       </p:pic>
       <p:pic>
         <p:nvPicPr>
-          <p:cNvPr id="8" name="Image 1" descr="deckimg/itpu_logo.png">    </p:cNvPr>
+          <p:cNvPr id="8" name="Image 1" descr="deckimg/itpu_logo.png"/>
           <p:cNvPicPr>
             <a:picLocks noChangeAspect="1"/>
           </p:cNvPicPr>
           <p:nvPr/>
         </p:nvPicPr>
         <p:blipFill>
-          <a:blip r:embed="rId2"/>
+          <a:blip r:embed="rId4"/>
           <a:stretch>
             <a:fillRect/>
           </a:stretch>
@@ -4375,7 +4144,7 @@
           <a:bodyPr wrap="square" rtlCol="0" anchor="ctr"/>
           <a:lstStyle/>
           <a:p>
-            <a:pPr indent="0" marL="0">
+            <a:pPr marL="0" indent="0">
               <a:buNone/>
             </a:pPr>
             <a:r>
@@ -4414,7 +4183,7 @@
           <a:bodyPr wrap="square" rtlCol="0" anchor="ctr"/>
           <a:lstStyle/>
           <a:p>
-            <a:pPr algn="r" indent="0" marL="0">
+            <a:pPr marL="0" indent="0" algn="r">
               <a:buNone/>
             </a:pPr>
             <a:r>
@@ -4448,6 +4217,7 @@
         <a:solidFill>
           <a:srgbClr val="FFFFFF"/>
         </a:solidFill>
+        <a:effectLst/>
       </p:bgPr>
     </p:bg>
     <p:spTree>
@@ -4525,11 +4295,11 @@
           <a:bodyPr wrap="square" rtlCol="0" anchor="ctr"/>
           <a:lstStyle/>
           <a:p>
-            <a:pPr indent="0" marL="0">
-              <a:buNone/>
-            </a:pPr>
-            <a:r>
-              <a:rPr lang="en-US" sz="1200" b="1" spc="200" kern="0" dirty="0">
+            <a:pPr marL="0" indent="0">
+              <a:buNone/>
+            </a:pPr>
+            <a:r>
+              <a:rPr lang="en-US" sz="1200" b="1" kern="0" spc="200" dirty="0">
                 <a:solidFill>
                   <a:srgbClr val="39C2D7"/>
                 </a:solidFill>
@@ -4564,7 +4334,7 @@
           <a:bodyPr wrap="square" rtlCol="0" anchor="ctr"/>
           <a:lstStyle/>
           <a:p>
-            <a:pPr indent="0" marL="0">
+            <a:pPr marL="0" indent="0">
               <a:buNone/>
             </a:pPr>
             <a:r>
@@ -4611,14 +4381,14 @@
       </p:sp>
       <p:pic>
         <p:nvPicPr>
-          <p:cNvPr id="7" name="Image 0" descr="deckimg/cv.png">    </p:cNvPr>
+          <p:cNvPr id="7" name="Image 0" descr="deckimg/cv.png"/>
           <p:cNvPicPr>
             <a:picLocks noChangeAspect="1"/>
           </p:cNvPicPr>
           <p:nvPr/>
         </p:nvPicPr>
         <p:blipFill>
-          <a:blip r:embed="rId1"/>
+          <a:blip r:embed="rId3"/>
           <a:stretch>
             <a:fillRect/>
           </a:stretch>
@@ -4681,7 +4451,7 @@
           <a:bodyPr wrap="square" rtlCol="0" anchor="ctr"/>
           <a:lstStyle/>
           <a:p>
-            <a:pPr indent="0" marL="0">
+            <a:pPr marL="0" indent="0">
               <a:buNone/>
             </a:pPr>
             <a:r>
@@ -4720,7 +4490,7 @@
           <a:bodyPr wrap="square" rtlCol="0" anchor="ctr"/>
           <a:lstStyle/>
           <a:p>
-            <a:pPr indent="0" marL="0">
+            <a:pPr marL="0" indent="0">
               <a:buNone/>
             </a:pPr>
             <a:r>
@@ -4759,7 +4529,7 @@
           <a:bodyPr wrap="square" rtlCol="0" anchor="ctr"/>
           <a:lstStyle/>
           <a:p>
-            <a:pPr indent="0" marL="0">
+            <a:pPr marL="0" indent="0">
               <a:buNone/>
             </a:pPr>
             <a:r>
@@ -4798,7 +4568,7 @@
           <a:bodyPr wrap="square" rtlCol="0" anchor="ctr"/>
           <a:lstStyle/>
           <a:p>
-            <a:pPr indent="0" marL="0">
+            <a:pPr marL="0" indent="0">
               <a:buNone/>
             </a:pPr>
             <a:r>
@@ -4818,14 +4588,14 @@
       </p:sp>
       <p:pic>
         <p:nvPicPr>
-          <p:cNvPr id="13" name="Image 1" descr="deckimg/itpu_logo.png">    </p:cNvPr>
+          <p:cNvPr id="13" name="Image 1" descr="deckimg/itpu_logo.png"/>
           <p:cNvPicPr>
             <a:picLocks noChangeAspect="1"/>
           </p:cNvPicPr>
           <p:nvPr/>
         </p:nvPicPr>
         <p:blipFill>
-          <a:blip r:embed="rId2"/>
+          <a:blip r:embed="rId4"/>
           <a:stretch>
             <a:fillRect/>
           </a:stretch>
@@ -4861,7 +4631,7 @@
           <a:bodyPr wrap="square" rtlCol="0" anchor="ctr"/>
           <a:lstStyle/>
           <a:p>
-            <a:pPr indent="0" marL="0">
+            <a:pPr marL="0" indent="0">
               <a:buNone/>
             </a:pPr>
             <a:r>
@@ -4900,7 +4670,7 @@
           <a:bodyPr wrap="square" rtlCol="0" anchor="ctr"/>
           <a:lstStyle/>
           <a:p>
-            <a:pPr algn="r" indent="0" marL="0">
+            <a:pPr marL="0" indent="0" algn="r">
               <a:buNone/>
             </a:pPr>
             <a:r>
@@ -4934,6 +4704,7 @@
         <a:solidFill>
           <a:srgbClr val="FFFFFF"/>
         </a:solidFill>
+        <a:effectLst/>
       </p:bgPr>
     </p:bg>
     <p:spTree>
@@ -5011,11 +4782,11 @@
           <a:bodyPr wrap="square" rtlCol="0" anchor="ctr"/>
           <a:lstStyle/>
           <a:p>
-            <a:pPr indent="0" marL="0">
-              <a:buNone/>
-            </a:pPr>
-            <a:r>
-              <a:rPr lang="en-US" sz="1200" b="1" spc="200" kern="0" dirty="0">
+            <a:pPr marL="0" indent="0">
+              <a:buNone/>
+            </a:pPr>
+            <a:r>
+              <a:rPr lang="en-US" sz="1200" b="1" kern="0" spc="200" dirty="0">
                 <a:solidFill>
                   <a:srgbClr val="39C2D7"/>
                 </a:solidFill>
@@ -5050,7 +4821,7 @@
           <a:bodyPr wrap="square" rtlCol="0" anchor="ctr"/>
           <a:lstStyle/>
           <a:p>
-            <a:pPr indent="0" marL="0">
+            <a:pPr marL="0" indent="0">
               <a:buNone/>
             </a:pPr>
             <a:r>
@@ -5116,7 +4887,7 @@
           <a:bodyPr wrap="square" rtlCol="0" anchor="ctr"/>
           <a:lstStyle/>
           <a:p>
-            <a:pPr indent="0" marL="0">
+            <a:pPr marL="0" indent="0">
               <a:buNone/>
             </a:pPr>
             <a:r>
@@ -5177,7 +4948,7 @@
           <a:bodyPr wrap="square" rtlCol="0" anchor="ctr"/>
           <a:lstStyle/>
           <a:p>
-            <a:pPr indent="0" marL="0">
+            <a:pPr marL="0" indent="0">
               <a:buNone/>
             </a:pPr>
             <a:r>
@@ -5216,7 +4987,7 @@
           <a:bodyPr wrap="square" rtlCol="0" anchor="ctr"/>
           <a:lstStyle/>
           <a:p>
-            <a:pPr indent="0" marL="0">
+            <a:pPr marL="0" indent="0">
               <a:buNone/>
             </a:pPr>
             <a:r>
@@ -5282,7 +5053,7 @@
           <a:bodyPr wrap="square" rtlCol="0" anchor="ctr"/>
           <a:lstStyle/>
           <a:p>
-            <a:pPr indent="0" marL="0">
+            <a:pPr marL="0" indent="0">
               <a:buNone/>
             </a:pPr>
             <a:r>
@@ -5343,7 +5114,7 @@
           <a:bodyPr wrap="square" rtlCol="0" anchor="ctr"/>
           <a:lstStyle/>
           <a:p>
-            <a:pPr indent="0" marL="0">
+            <a:pPr marL="0" indent="0">
               <a:buNone/>
             </a:pPr>
             <a:r>
@@ -5382,7 +5153,7 @@
           <a:bodyPr wrap="square" rtlCol="0" anchor="ctr"/>
           <a:lstStyle/>
           <a:p>
-            <a:pPr indent="0" marL="0">
+            <a:pPr marL="0" indent="0">
               <a:buNone/>
             </a:pPr>
             <a:r>
@@ -5448,7 +5219,7 @@
           <a:bodyPr wrap="square" rtlCol="0" anchor="ctr"/>
           <a:lstStyle/>
           <a:p>
-            <a:pPr indent="0" marL="0">
+            <a:pPr marL="0" indent="0">
               <a:buNone/>
             </a:pPr>
             <a:r>
@@ -5509,7 +5280,7 @@
           <a:bodyPr wrap="square" rtlCol="0" anchor="ctr"/>
           <a:lstStyle/>
           <a:p>
-            <a:pPr indent="0" marL="0">
+            <a:pPr marL="0" indent="0">
               <a:buNone/>
             </a:pPr>
             <a:r>
@@ -5548,7 +5319,7 @@
           <a:bodyPr wrap="square" rtlCol="0" anchor="ctr"/>
           <a:lstStyle/>
           <a:p>
-            <a:pPr indent="0" marL="0">
+            <a:pPr marL="0" indent="0">
               <a:buNone/>
             </a:pPr>
             <a:r>
@@ -5614,7 +5385,7 @@
           <a:bodyPr wrap="square" rtlCol="0" anchor="ctr"/>
           <a:lstStyle/>
           <a:p>
-            <a:pPr indent="0" marL="0">
+            <a:pPr marL="0" indent="0">
               <a:buNone/>
             </a:pPr>
             <a:r>
@@ -5675,7 +5446,7 @@
           <a:bodyPr wrap="square" rtlCol="0" anchor="ctr"/>
           <a:lstStyle/>
           <a:p>
-            <a:pPr indent="0" marL="0">
+            <a:pPr marL="0" indent="0">
               <a:buNone/>
             </a:pPr>
             <a:r>
@@ -5714,7 +5485,7 @@
           <a:bodyPr wrap="square" rtlCol="0" anchor="ctr"/>
           <a:lstStyle/>
           <a:p>
-            <a:pPr indent="0" marL="0">
+            <a:pPr marL="0" indent="0">
               <a:buNone/>
             </a:pPr>
             <a:r>
@@ -5734,14 +5505,14 @@
       </p:sp>
       <p:pic>
         <p:nvPicPr>
-          <p:cNvPr id="26" name="Image 0" descr="deckimg/itpu_logo.png">    </p:cNvPr>
+          <p:cNvPr id="26" name="Image 0" descr="deckimg/itpu_logo.png"/>
           <p:cNvPicPr>
             <a:picLocks noChangeAspect="1"/>
           </p:cNvPicPr>
           <p:nvPr/>
         </p:nvPicPr>
         <p:blipFill>
-          <a:blip r:embed="rId1"/>
+          <a:blip r:embed="rId3"/>
           <a:stretch>
             <a:fillRect/>
           </a:stretch>
@@ -5777,7 +5548,7 @@
           <a:bodyPr wrap="square" rtlCol="0" anchor="ctr"/>
           <a:lstStyle/>
           <a:p>
-            <a:pPr indent="0" marL="0">
+            <a:pPr marL="0" indent="0">
               <a:buNone/>
             </a:pPr>
             <a:r>
@@ -5816,7 +5587,7 @@
           <a:bodyPr wrap="square" rtlCol="0" anchor="ctr"/>
           <a:lstStyle/>
           <a:p>
-            <a:pPr algn="r" indent="0" marL="0">
+            <a:pPr marL="0" indent="0" algn="r">
               <a:buNone/>
             </a:pPr>
             <a:r>
@@ -5850,6 +5621,7 @@
         <a:solidFill>
           <a:srgbClr val="FFFFFF"/>
         </a:solidFill>
+        <a:effectLst/>
       </p:bgPr>
     </p:bg>
     <p:spTree>
@@ -5927,11 +5699,11 @@
           <a:bodyPr wrap="square" rtlCol="0" anchor="ctr"/>
           <a:lstStyle/>
           <a:p>
-            <a:pPr indent="0" marL="0">
-              <a:buNone/>
-            </a:pPr>
-            <a:r>
-              <a:rPr lang="en-US" sz="1200" b="1" spc="200" kern="0" dirty="0">
+            <a:pPr marL="0" indent="0">
+              <a:buNone/>
+            </a:pPr>
+            <a:r>
+              <a:rPr lang="en-US" sz="1200" b="1" kern="0" spc="200" dirty="0">
                 <a:solidFill>
                   <a:srgbClr val="39C2D7"/>
                 </a:solidFill>
@@ -5966,7 +5738,7 @@
           <a:bodyPr wrap="square" rtlCol="0" anchor="ctr"/>
           <a:lstStyle/>
           <a:p>
-            <a:pPr indent="0" marL="0">
+            <a:pPr marL="0" indent="0">
               <a:buNone/>
             </a:pPr>
             <a:r>
@@ -6054,7 +5826,7 @@
           <a:bodyPr wrap="square" rtlCol="0" anchor="ctr"/>
           <a:lstStyle/>
           <a:p>
-            <a:pPr indent="0" marL="0">
+            <a:pPr marL="0" indent="0">
               <a:buNone/>
             </a:pPr>
             <a:r>
@@ -6093,7 +5865,7 @@
           <a:bodyPr wrap="square" rtlCol="0" anchor="ctr"/>
           <a:lstStyle/>
           <a:p>
-            <a:pPr indent="0" marL="0">
+            <a:pPr marL="0" indent="0">
               <a:buNone/>
             </a:pPr>
             <a:r>
@@ -6132,7 +5904,7 @@
           <a:bodyPr wrap="square" rtlCol="0" anchor="ctr"/>
           <a:lstStyle/>
           <a:p>
-            <a:pPr indent="0" marL="0">
+            <a:pPr marL="0" indent="0">
               <a:buNone/>
             </a:pPr>
             <a:r>
@@ -6220,7 +5992,7 @@
           <a:bodyPr wrap="square" rtlCol="0" anchor="ctr"/>
           <a:lstStyle/>
           <a:p>
-            <a:pPr indent="0" marL="0">
+            <a:pPr marL="0" indent="0">
               <a:buNone/>
             </a:pPr>
             <a:r>
@@ -6259,7 +6031,7 @@
           <a:bodyPr wrap="square" rtlCol="0" anchor="ctr"/>
           <a:lstStyle/>
           <a:p>
-            <a:pPr indent="0" marL="0">
+            <a:pPr marL="0" indent="0">
               <a:buNone/>
             </a:pPr>
             <a:r>
@@ -6298,7 +6070,7 @@
           <a:bodyPr wrap="square" rtlCol="0" anchor="ctr"/>
           <a:lstStyle/>
           <a:p>
-            <a:pPr indent="0" marL="0">
+            <a:pPr marL="0" indent="0">
               <a:buNone/>
             </a:pPr>
             <a:r>
@@ -6318,14 +6090,14 @@
       </p:sp>
       <p:pic>
         <p:nvPicPr>
-          <p:cNvPr id="16" name="Image 0" descr="deckimg/itpu_logo.png">    </p:cNvPr>
+          <p:cNvPr id="16" name="Image 0" descr="deckimg/itpu_logo.png"/>
           <p:cNvPicPr>
             <a:picLocks noChangeAspect="1"/>
           </p:cNvPicPr>
           <p:nvPr/>
         </p:nvPicPr>
         <p:blipFill>
-          <a:blip r:embed="rId1"/>
+          <a:blip r:embed="rId3"/>
           <a:stretch>
             <a:fillRect/>
           </a:stretch>
@@ -6361,7 +6133,7 @@
           <a:bodyPr wrap="square" rtlCol="0" anchor="ctr"/>
           <a:lstStyle/>
           <a:p>
-            <a:pPr indent="0" marL="0">
+            <a:pPr marL="0" indent="0">
               <a:buNone/>
             </a:pPr>
             <a:r>
@@ -6400,7 +6172,7 @@
           <a:bodyPr wrap="square" rtlCol="0" anchor="ctr"/>
           <a:lstStyle/>
           <a:p>
-            <a:pPr algn="r" indent="0" marL="0">
+            <a:pPr marL="0" indent="0" algn="r">
               <a:buNone/>
             </a:pPr>
             <a:r>
@@ -6434,6 +6206,7 @@
         <a:solidFill>
           <a:srgbClr val="FFFFFF"/>
         </a:solidFill>
+        <a:effectLst/>
       </p:bgPr>
     </p:bg>
     <p:spTree>
@@ -6511,11 +6284,11 @@
           <a:bodyPr wrap="square" rtlCol="0" anchor="ctr"/>
           <a:lstStyle/>
           <a:p>
-            <a:pPr indent="0" marL="0">
-              <a:buNone/>
-            </a:pPr>
-            <a:r>
-              <a:rPr lang="en-US" sz="1200" b="1" spc="200" kern="0" dirty="0">
+            <a:pPr marL="0" indent="0">
+              <a:buNone/>
+            </a:pPr>
+            <a:r>
+              <a:rPr lang="en-US" sz="1200" b="1" kern="0" spc="200" dirty="0">
                 <a:solidFill>
                   <a:srgbClr val="39C2D7"/>
                 </a:solidFill>
@@ -6550,7 +6323,7 @@
           <a:bodyPr wrap="square" rtlCol="0" anchor="ctr"/>
           <a:lstStyle/>
           <a:p>
-            <a:pPr indent="0" marL="0">
+            <a:pPr marL="0" indent="0">
               <a:buNone/>
             </a:pPr>
             <a:r>
@@ -6616,7 +6389,7 @@
           <a:bodyPr wrap="square" rtlCol="0" anchor="ctr"/>
           <a:lstStyle/>
           <a:p>
-            <a:pPr indent="0" marL="0">
+            <a:pPr marL="0" indent="0">
               <a:buNone/>
             </a:pPr>
             <a:r>
@@ -6677,7 +6450,7 @@
           <a:bodyPr wrap="square" rtlCol="0" anchor="ctr"/>
           <a:lstStyle/>
           <a:p>
-            <a:pPr indent="0" marL="0">
+            <a:pPr marL="0" indent="0">
               <a:buNone/>
             </a:pPr>
             <a:r>
@@ -6716,7 +6489,7 @@
           <a:bodyPr wrap="square" rtlCol="0" anchor="ctr"/>
           <a:lstStyle/>
           <a:p>
-            <a:pPr indent="0" marL="0">
+            <a:pPr marL="0" indent="0">
               <a:buNone/>
             </a:pPr>
             <a:r>
@@ -6782,7 +6555,7 @@
           <a:bodyPr wrap="square" rtlCol="0" anchor="ctr"/>
           <a:lstStyle/>
           <a:p>
-            <a:pPr indent="0" marL="0">
+            <a:pPr marL="0" indent="0">
               <a:buNone/>
             </a:pPr>
             <a:r>
@@ -6843,7 +6616,7 @@
           <a:bodyPr wrap="square" rtlCol="0" anchor="ctr"/>
           <a:lstStyle/>
           <a:p>
-            <a:pPr indent="0" marL="0">
+            <a:pPr marL="0" indent="0">
               <a:buNone/>
             </a:pPr>
             <a:r>
@@ -6882,7 +6655,7 @@
           <a:bodyPr wrap="square" rtlCol="0" anchor="ctr"/>
           <a:lstStyle/>
           <a:p>
-            <a:pPr indent="0" marL="0">
+            <a:pPr marL="0" indent="0">
               <a:buNone/>
             </a:pPr>
             <a:r>
@@ -6948,7 +6721,7 @@
           <a:bodyPr wrap="square" rtlCol="0" anchor="ctr"/>
           <a:lstStyle/>
           <a:p>
-            <a:pPr indent="0" marL="0">
+            <a:pPr marL="0" indent="0">
               <a:buNone/>
             </a:pPr>
             <a:r>
@@ -7009,7 +6782,7 @@
           <a:bodyPr wrap="square" rtlCol="0" anchor="ctr"/>
           <a:lstStyle/>
           <a:p>
-            <a:pPr indent="0" marL="0">
+            <a:pPr marL="0" indent="0">
               <a:buNone/>
             </a:pPr>
             <a:r>
@@ -7048,7 +6821,7 @@
           <a:bodyPr wrap="square" rtlCol="0" anchor="ctr"/>
           <a:lstStyle/>
           <a:p>
-            <a:pPr indent="0" marL="0">
+            <a:pPr marL="0" indent="0">
               <a:buNone/>
             </a:pPr>
             <a:r>
@@ -7114,7 +6887,7 @@
           <a:bodyPr wrap="square" rtlCol="0" anchor="ctr"/>
           <a:lstStyle/>
           <a:p>
-            <a:pPr indent="0" marL="0">
+            <a:pPr marL="0" indent="0">
               <a:buNone/>
             </a:pPr>
             <a:r>
@@ -7175,7 +6948,7 @@
           <a:bodyPr wrap="square" rtlCol="0" anchor="ctr"/>
           <a:lstStyle/>
           <a:p>
-            <a:pPr indent="0" marL="0">
+            <a:pPr marL="0" indent="0">
               <a:buNone/>
             </a:pPr>
             <a:r>
@@ -7214,7 +6987,7 @@
           <a:bodyPr wrap="square" rtlCol="0" anchor="ctr"/>
           <a:lstStyle/>
           <a:p>
-            <a:pPr indent="0" marL="0">
+            <a:pPr marL="0" indent="0">
               <a:buNone/>
             </a:pPr>
             <a:r>
@@ -7280,7 +7053,7 @@
           <a:bodyPr wrap="square" rtlCol="0" anchor="ctr"/>
           <a:lstStyle/>
           <a:p>
-            <a:pPr indent="0" marL="0">
+            <a:pPr marL="0" indent="0">
               <a:buNone/>
             </a:pPr>
             <a:r>
@@ -7341,7 +7114,7 @@
           <a:bodyPr wrap="square" rtlCol="0" anchor="ctr"/>
           <a:lstStyle/>
           <a:p>
-            <a:pPr indent="0" marL="0">
+            <a:pPr marL="0" indent="0">
               <a:buNone/>
             </a:pPr>
             <a:r>
@@ -7380,7 +7153,7 @@
           <a:bodyPr wrap="square" rtlCol="0" anchor="ctr"/>
           <a:lstStyle/>
           <a:p>
-            <a:pPr indent="0" marL="0">
+            <a:pPr marL="0" indent="0">
               <a:buNone/>
             </a:pPr>
             <a:r>
@@ -7400,14 +7173,14 @@
       </p:sp>
       <p:pic>
         <p:nvPicPr>
-          <p:cNvPr id="31" name="Image 0" descr="deckimg/itpu_logo.png">    </p:cNvPr>
+          <p:cNvPr id="31" name="Image 0" descr="deckimg/itpu_logo.png"/>
           <p:cNvPicPr>
             <a:picLocks noChangeAspect="1"/>
           </p:cNvPicPr>
           <p:nvPr/>
         </p:nvPicPr>
         <p:blipFill>
-          <a:blip r:embed="rId1"/>
+          <a:blip r:embed="rId3"/>
           <a:stretch>
             <a:fillRect/>
           </a:stretch>
@@ -7443,7 +7216,7 @@
           <a:bodyPr wrap="square" rtlCol="0" anchor="ctr"/>
           <a:lstStyle/>
           <a:p>
-            <a:pPr indent="0" marL="0">
+            <a:pPr marL="0" indent="0">
               <a:buNone/>
             </a:pPr>
             <a:r>
@@ -7482,7 +7255,7 @@
           <a:bodyPr wrap="square" rtlCol="0" anchor="ctr"/>
           <a:lstStyle/>
           <a:p>
-            <a:pPr algn="r" indent="0" marL="0">
+            <a:pPr marL="0" indent="0" algn="r">
               <a:buNone/>
             </a:pPr>
             <a:r>
@@ -7516,6 +7289,7 @@
         <a:solidFill>
           <a:srgbClr val="FFFFFF"/>
         </a:solidFill>
+        <a:effectLst/>
       </p:bgPr>
     </p:bg>
     <p:spTree>
@@ -7593,11 +7367,11 @@
           <a:bodyPr wrap="square" rtlCol="0" anchor="ctr"/>
           <a:lstStyle/>
           <a:p>
-            <a:pPr indent="0" marL="0">
-              <a:buNone/>
-            </a:pPr>
-            <a:r>
-              <a:rPr lang="en-US" sz="1200" b="1" spc="200" kern="0" dirty="0">
+            <a:pPr marL="0" indent="0">
+              <a:buNone/>
+            </a:pPr>
+            <a:r>
+              <a:rPr lang="en-US" sz="1200" b="1" kern="0" spc="200" dirty="0">
                 <a:solidFill>
                   <a:srgbClr val="39C2D7"/>
                 </a:solidFill>
@@ -7632,7 +7406,7 @@
           <a:bodyPr wrap="square" rtlCol="0" anchor="ctr"/>
           <a:lstStyle/>
           <a:p>
-            <a:pPr indent="0" marL="0">
+            <a:pPr marL="0" indent="0">
               <a:buNone/>
             </a:pPr>
             <a:r>
@@ -7693,7 +7467,7 @@
           <a:bodyPr wrap="square" rtlCol="0" anchor="ctr"/>
           <a:lstStyle/>
           <a:p>
-            <a:pPr indent="0" marL="0">
+            <a:pPr marL="0" indent="0">
               <a:buNone/>
             </a:pPr>
             <a:r>
@@ -7781,7 +7555,7 @@
           <a:bodyPr wrap="square" rtlCol="0" anchor="ctr"/>
           <a:lstStyle/>
           <a:p>
-            <a:pPr indent="0" marL="0">
+            <a:pPr marL="0" indent="0">
               <a:buNone/>
             </a:pPr>
             <a:r>
@@ -7820,7 +7594,7 @@
           <a:bodyPr wrap="square" rtlCol="0" anchor="ctr"/>
           <a:lstStyle/>
           <a:p>
-            <a:pPr indent="0" marL="0">
+            <a:pPr marL="0" indent="0">
               <a:buNone/>
             </a:pPr>
             <a:r>
@@ -7859,7 +7633,7 @@
           <a:bodyPr wrap="square" rtlCol="0" anchor="ctr"/>
           <a:lstStyle/>
           <a:p>
-            <a:pPr indent="0" marL="0">
+            <a:pPr marL="0" indent="0">
               <a:buNone/>
             </a:pPr>
             <a:r>
@@ -7947,7 +7721,7 @@
           <a:bodyPr wrap="square" rtlCol="0" anchor="ctr"/>
           <a:lstStyle/>
           <a:p>
-            <a:pPr indent="0" marL="0">
+            <a:pPr marL="0" indent="0">
               <a:buNone/>
             </a:pPr>
             <a:r>
@@ -7986,7 +7760,7 @@
           <a:bodyPr wrap="square" rtlCol="0" anchor="ctr"/>
           <a:lstStyle/>
           <a:p>
-            <a:pPr indent="0" marL="0">
+            <a:pPr marL="0" indent="0">
               <a:buNone/>
             </a:pPr>
             <a:r>
@@ -8025,7 +7799,7 @@
           <a:bodyPr wrap="square" rtlCol="0" anchor="ctr"/>
           <a:lstStyle/>
           <a:p>
-            <a:pPr indent="0" marL="0">
+            <a:pPr marL="0" indent="0">
               <a:buNone/>
             </a:pPr>
             <a:r>
@@ -8113,7 +7887,7 @@
           <a:bodyPr wrap="square" rtlCol="0" anchor="ctr"/>
           <a:lstStyle/>
           <a:p>
-            <a:pPr indent="0" marL="0">
+            <a:pPr marL="0" indent="0">
               <a:buNone/>
             </a:pPr>
             <a:r>
@@ -8152,7 +7926,7 @@
           <a:bodyPr wrap="square" rtlCol="0" anchor="ctr"/>
           <a:lstStyle/>
           <a:p>
-            <a:pPr indent="0" marL="0">
+            <a:pPr marL="0" indent="0">
               <a:buNone/>
             </a:pPr>
             <a:r>
@@ -8191,7 +7965,7 @@
           <a:bodyPr wrap="square" rtlCol="0" anchor="ctr"/>
           <a:lstStyle/>
           <a:p>
-            <a:pPr indent="0" marL="0">
+            <a:pPr marL="0" indent="0">
               <a:buNone/>
             </a:pPr>
             <a:r>
@@ -8257,7 +8031,7 @@
           <a:bodyPr wrap="square" rtlCol="0" anchor="ctr"/>
           <a:lstStyle/>
           <a:p>
-            <a:pPr indent="0" marL="0">
+            <a:pPr marL="0" indent="0">
               <a:buNone/>
             </a:pPr>
             <a:r>
@@ -8277,14 +8051,14 @@
       </p:sp>
       <p:pic>
         <p:nvPicPr>
-          <p:cNvPr id="25" name="Image 0" descr="deckimg/itpu_logo.png">    </p:cNvPr>
+          <p:cNvPr id="25" name="Image 0" descr="deckimg/itpu_logo.png"/>
           <p:cNvPicPr>
             <a:picLocks noChangeAspect="1"/>
           </p:cNvPicPr>
           <p:nvPr/>
         </p:nvPicPr>
         <p:blipFill>
-          <a:blip r:embed="rId1"/>
+          <a:blip r:embed="rId3"/>
           <a:stretch>
             <a:fillRect/>
           </a:stretch>
@@ -8320,7 +8094,7 @@
           <a:bodyPr wrap="square" rtlCol="0" anchor="ctr"/>
           <a:lstStyle/>
           <a:p>
-            <a:pPr indent="0" marL="0">
+            <a:pPr marL="0" indent="0">
               <a:buNone/>
             </a:pPr>
             <a:r>
@@ -8359,7 +8133,7 @@
           <a:bodyPr wrap="square" rtlCol="0" anchor="ctr"/>
           <a:lstStyle/>
           <a:p>
-            <a:pPr algn="r" indent="0" marL="0">
+            <a:pPr marL="0" indent="0" algn="r">
               <a:buNone/>
             </a:pPr>
             <a:r>
@@ -8393,6 +8167,7 @@
         <a:solidFill>
           <a:srgbClr val="263852"/>
         </a:solidFill>
+        <a:effectLst/>
       </p:bgPr>
     </p:bg>
     <p:spTree>
@@ -8452,7 +8227,7 @@
           <a:bodyPr wrap="square" rtlCol="0" anchor="ctr"/>
           <a:lstStyle/>
           <a:p>
-            <a:pPr indent="0" marL="0">
+            <a:pPr marL="0" indent="0">
               <a:buNone/>
             </a:pPr>
             <a:r>
@@ -8513,7 +8288,7 @@
           <a:bodyPr wrap="square" rtlCol="0" anchor="ctr"/>
           <a:lstStyle/>
           <a:p>
-            <a:pPr algn="ctr" indent="0" marL="0">
+            <a:pPr marL="0" indent="0" algn="ctr">
               <a:buNone/>
             </a:pPr>
             <a:r>
@@ -8552,7 +8327,7 @@
           <a:bodyPr wrap="square" rtlCol="0" anchor="ctr"/>
           <a:lstStyle/>
           <a:p>
-            <a:pPr indent="0" marL="0">
+            <a:pPr marL="0" indent="0">
               <a:buNone/>
             </a:pPr>
             <a:r>
@@ -8566,9 +8341,6 @@
               </a:rPr>
               <a:t>Training  </a:t>
             </a:r>
-            <a:pPr indent="0" marL="0">
-              <a:buNone/>
-            </a:pPr>
             <a:r>
               <a:rPr lang="en-US" sz="1200" dirty="0">
                 <a:solidFill>
@@ -8627,7 +8399,7 @@
           <a:bodyPr wrap="square" rtlCol="0" anchor="ctr"/>
           <a:lstStyle/>
           <a:p>
-            <a:pPr algn="ctr" indent="0" marL="0">
+            <a:pPr marL="0" indent="0" algn="ctr">
               <a:buNone/>
             </a:pPr>
             <a:r>
@@ -8666,7 +8438,7 @@
           <a:bodyPr wrap="square" rtlCol="0" anchor="ctr"/>
           <a:lstStyle/>
           <a:p>
-            <a:pPr indent="0" marL="0">
+            <a:pPr marL="0" indent="0">
               <a:buNone/>
             </a:pPr>
             <a:r>
@@ -8680,9 +8452,6 @@
               </a:rPr>
               <a:t>Generalize  </a:t>
             </a:r>
-            <a:pPr indent="0" marL="0">
-              <a:buNone/>
-            </a:pPr>
             <a:r>
               <a:rPr lang="en-US" sz="1200" dirty="0">
                 <a:solidFill>
@@ -8741,7 +8510,7 @@
           <a:bodyPr wrap="square" rtlCol="0" anchor="ctr"/>
           <a:lstStyle/>
           <a:p>
-            <a:pPr algn="ctr" indent="0" marL="0">
+            <a:pPr marL="0" indent="0" algn="ctr">
               <a:buNone/>
             </a:pPr>
             <a:r>
@@ -8780,7 +8549,7 @@
           <a:bodyPr wrap="square" rtlCol="0" anchor="ctr"/>
           <a:lstStyle/>
           <a:p>
-            <a:pPr indent="0" marL="0">
+            <a:pPr marL="0" indent="0">
               <a:buNone/>
             </a:pPr>
             <a:r>
@@ -8794,9 +8563,6 @@
               </a:rPr>
               <a:t>Bias–variance  </a:t>
             </a:r>
-            <a:pPr indent="0" marL="0">
-              <a:buNone/>
-            </a:pPr>
             <a:r>
               <a:rPr lang="en-US" sz="1200" dirty="0">
                 <a:solidFill>
@@ -8855,7 +8621,7 @@
           <a:bodyPr wrap="square" rtlCol="0" anchor="ctr"/>
           <a:lstStyle/>
           <a:p>
-            <a:pPr algn="ctr" indent="0" marL="0">
+            <a:pPr marL="0" indent="0" algn="ctr">
               <a:buNone/>
             </a:pPr>
             <a:r>
@@ -8894,7 +8660,7 @@
           <a:bodyPr wrap="square" rtlCol="0" anchor="ctr"/>
           <a:lstStyle/>
           <a:p>
-            <a:pPr indent="0" marL="0">
+            <a:pPr marL="0" indent="0">
               <a:buNone/>
             </a:pPr>
             <a:r>
@@ -8908,9 +8674,6 @@
               </a:rPr>
               <a:t>Interpret  </a:t>
             </a:r>
-            <a:pPr indent="0" marL="0">
-              <a:buNone/>
-            </a:pPr>
             <a:r>
               <a:rPr lang="en-US" sz="1200" dirty="0">
                 <a:solidFill>
@@ -8969,7 +8732,7 @@
           <a:bodyPr wrap="square" rtlCol="0" anchor="ctr"/>
           <a:lstStyle/>
           <a:p>
-            <a:pPr algn="ctr" indent="0" marL="0">
+            <a:pPr marL="0" indent="0" algn="ctr">
               <a:buNone/>
             </a:pPr>
             <a:r>
@@ -9008,7 +8771,7 @@
           <a:bodyPr wrap="square" rtlCol="0" anchor="ctr"/>
           <a:lstStyle/>
           <a:p>
-            <a:pPr indent="0" marL="0">
+            <a:pPr marL="0" indent="0">
               <a:buNone/>
             </a:pPr>
             <a:r>
@@ -9022,9 +8785,6 @@
               </a:rPr>
               <a:t>Cross-validate  </a:t>
             </a:r>
-            <a:pPr indent="0" marL="0">
-              <a:buNone/>
-            </a:pPr>
             <a:r>
               <a:rPr lang="en-US" sz="1200" dirty="0">
                 <a:solidFill>
@@ -9083,7 +8843,7 @@
           <a:bodyPr wrap="square" rtlCol="0" anchor="ctr"/>
           <a:lstStyle/>
           <a:p>
-            <a:pPr algn="ctr" indent="0" marL="0">
+            <a:pPr marL="0" indent="0" algn="ctr">
               <a:buNone/>
             </a:pPr>
             <a:r>
@@ -9122,7 +8882,7 @@
           <a:bodyPr wrap="square" rtlCol="0" anchor="ctr"/>
           <a:lstStyle/>
           <a:p>
-            <a:pPr indent="0" marL="0">
+            <a:pPr marL="0" indent="0">
               <a:buNone/>
             </a:pPr>
             <a:r>
@@ -9136,9 +8896,6 @@
               </a:rPr>
               <a:t>Metrics  </a:t>
             </a:r>
-            <a:pPr indent="0" marL="0">
-              <a:buNone/>
-            </a:pPr>
             <a:r>
               <a:rPr lang="en-US" sz="1200" dirty="0">
                 <a:solidFill>
@@ -9197,7 +8954,7 @@
           <a:bodyPr wrap="square" rtlCol="0" anchor="ctr"/>
           <a:lstStyle/>
           <a:p>
-            <a:pPr indent="0" marL="0">
+            <a:pPr marL="0" indent="0">
               <a:buNone/>
             </a:pPr>
             <a:r>
@@ -9236,7 +8993,7 @@
           <a:bodyPr wrap="square" rtlCol="0" anchor="ctr"/>
           <a:lstStyle/>
           <a:p>
-            <a:pPr indent="0" marL="0">
+            <a:pPr marL="0" indent="0">
               <a:buNone/>
             </a:pPr>
             <a:r>
@@ -9253,13 +9010,13 @@
             <a:endParaRPr lang="en-US" sz="1350" dirty="0"/>
           </a:p>
           <a:p>
-            <a:pPr indent="0" marL="0">
+            <a:pPr marL="0" indent="0">
               <a:buNone/>
             </a:pPr>
             <a:endParaRPr lang="en-US" sz="1350" dirty="0"/>
           </a:p>
           <a:p>
-            <a:pPr indent="0" marL="0">
+            <a:pPr marL="0" indent="0">
               <a:buNone/>
             </a:pPr>
             <a:r>
@@ -9276,13 +9033,13 @@
             <a:endParaRPr lang="en-US" sz="1350" dirty="0"/>
           </a:p>
           <a:p>
-            <a:pPr indent="0" marL="0">
+            <a:pPr marL="0" indent="0">
               <a:buNone/>
             </a:pPr>
             <a:endParaRPr lang="en-US" sz="1350" dirty="0"/>
           </a:p>
           <a:p>
-            <a:pPr indent="0" marL="0">
+            <a:pPr marL="0" indent="0">
               <a:buNone/>
             </a:pPr>
             <a:r>
@@ -9299,13 +9056,13 @@
             <a:endParaRPr lang="en-US" sz="1350" dirty="0"/>
           </a:p>
           <a:p>
-            <a:pPr indent="0" marL="0">
+            <a:pPr marL="0" indent="0">
               <a:buNone/>
             </a:pPr>
             <a:endParaRPr lang="en-US" sz="1350" dirty="0"/>
           </a:p>
           <a:p>
-            <a:pPr indent="0" marL="0">
+            <a:pPr marL="0" indent="0">
               <a:buNone/>
             </a:pPr>
             <a:r>
@@ -9344,7 +9101,7 @@
           <a:bodyPr wrap="square" rtlCol="0" anchor="ctr"/>
           <a:lstStyle/>
           <a:p>
-            <a:pPr indent="0" marL="0">
+            <a:pPr marL="0" indent="0">
               <a:buNone/>
             </a:pPr>
             <a:r>
@@ -9364,14 +9121,14 @@
       </p:sp>
       <p:pic>
         <p:nvPicPr>
-          <p:cNvPr id="26" name="Image 0" descr="deckimg/itpu_logo.png">    </p:cNvPr>
+          <p:cNvPr id="26" name="Image 0" descr="deckimg/itpu_logo.png"/>
           <p:cNvPicPr>
             <a:picLocks noChangeAspect="1"/>
           </p:cNvPicPr>
           <p:nvPr/>
         </p:nvPicPr>
         <p:blipFill>
-          <a:blip r:embed="rId1"/>
+          <a:blip r:embed="rId3"/>
           <a:stretch>
             <a:fillRect/>
           </a:stretch>
@@ -9402,6 +9159,7 @@
         <a:solidFill>
           <a:srgbClr val="FFFFFF"/>
         </a:solidFill>
+        <a:effectLst/>
       </p:bgPr>
     </p:bg>
     <p:spTree>
@@ -9479,11 +9237,11 @@
           <a:bodyPr wrap="square" rtlCol="0" anchor="ctr"/>
           <a:lstStyle/>
           <a:p>
-            <a:pPr indent="0" marL="0">
-              <a:buNone/>
-            </a:pPr>
-            <a:r>
-              <a:rPr lang="en-US" sz="1200" b="1" spc="200" kern="0" dirty="0">
+            <a:pPr marL="0" indent="0">
+              <a:buNone/>
+            </a:pPr>
+            <a:r>
+              <a:rPr lang="en-US" sz="1200" b="1" kern="0" spc="200" dirty="0">
                 <a:solidFill>
                   <a:srgbClr val="39C2D7"/>
                 </a:solidFill>
@@ -9518,7 +9276,7 @@
           <a:bodyPr wrap="square" rtlCol="0" anchor="ctr"/>
           <a:lstStyle/>
           <a:p>
-            <a:pPr indent="0" marL="0">
+            <a:pPr marL="0" indent="0">
               <a:buNone/>
             </a:pPr>
             <a:r>
@@ -9604,7 +9362,7 @@
           <a:bodyPr wrap="square" rtlCol="0" anchor="ctr"/>
           <a:lstStyle/>
           <a:p>
-            <a:pPr algn="ctr" indent="0" marL="0">
+            <a:pPr marL="0" indent="0" algn="ctr">
               <a:buNone/>
             </a:pPr>
             <a:r>
@@ -9643,7 +9401,7 @@
           <a:bodyPr wrap="square" rtlCol="0" anchor="ctr"/>
           <a:lstStyle/>
           <a:p>
-            <a:pPr indent="0" marL="0">
+            <a:pPr marL="0" indent="0">
               <a:buNone/>
             </a:pPr>
             <a:r>
@@ -9682,7 +9440,7 @@
           <a:bodyPr wrap="square" rtlCol="0" anchor="ctr"/>
           <a:lstStyle/>
           <a:p>
-            <a:pPr indent="0" marL="0">
+            <a:pPr marL="0" indent="0">
               <a:buNone/>
             </a:pPr>
             <a:r>
@@ -9768,7 +9526,7 @@
           <a:bodyPr wrap="square" rtlCol="0" anchor="ctr"/>
           <a:lstStyle/>
           <a:p>
-            <a:pPr algn="ctr" indent="0" marL="0">
+            <a:pPr marL="0" indent="0" algn="ctr">
               <a:buNone/>
             </a:pPr>
             <a:r>
@@ -9807,7 +9565,7 @@
           <a:bodyPr wrap="square" rtlCol="0" anchor="ctr"/>
           <a:lstStyle/>
           <a:p>
-            <a:pPr indent="0" marL="0">
+            <a:pPr marL="0" indent="0">
               <a:buNone/>
             </a:pPr>
             <a:r>
@@ -9846,7 +9604,7 @@
           <a:bodyPr wrap="square" rtlCol="0" anchor="ctr"/>
           <a:lstStyle/>
           <a:p>
-            <a:pPr indent="0" marL="0">
+            <a:pPr marL="0" indent="0">
               <a:buNone/>
             </a:pPr>
             <a:r>
@@ -9932,7 +9690,7 @@
           <a:bodyPr wrap="square" rtlCol="0" anchor="ctr"/>
           <a:lstStyle/>
           <a:p>
-            <a:pPr algn="ctr" indent="0" marL="0">
+            <a:pPr marL="0" indent="0" algn="ctr">
               <a:buNone/>
             </a:pPr>
             <a:r>
@@ -9971,7 +9729,7 @@
           <a:bodyPr wrap="square" rtlCol="0" anchor="ctr"/>
           <a:lstStyle/>
           <a:p>
-            <a:pPr indent="0" marL="0">
+            <a:pPr marL="0" indent="0">
               <a:buNone/>
             </a:pPr>
             <a:r>
@@ -10010,7 +9768,7 @@
           <a:bodyPr wrap="square" rtlCol="0" anchor="ctr"/>
           <a:lstStyle/>
           <a:p>
-            <a:pPr indent="0" marL="0">
+            <a:pPr marL="0" indent="0">
               <a:buNone/>
             </a:pPr>
             <a:r>
@@ -10096,7 +9854,7 @@
           <a:bodyPr wrap="square" rtlCol="0" anchor="ctr"/>
           <a:lstStyle/>
           <a:p>
-            <a:pPr algn="ctr" indent="0" marL="0">
+            <a:pPr marL="0" indent="0" algn="ctr">
               <a:buNone/>
             </a:pPr>
             <a:r>
@@ -10135,7 +9893,7 @@
           <a:bodyPr wrap="square" rtlCol="0" anchor="ctr"/>
           <a:lstStyle/>
           <a:p>
-            <a:pPr indent="0" marL="0">
+            <a:pPr marL="0" indent="0">
               <a:buNone/>
             </a:pPr>
             <a:r>
@@ -10174,7 +9932,7 @@
           <a:bodyPr wrap="square" rtlCol="0" anchor="ctr"/>
           <a:lstStyle/>
           <a:p>
-            <a:pPr indent="0" marL="0">
+            <a:pPr marL="0" indent="0">
               <a:buNone/>
             </a:pPr>
             <a:r>
@@ -10260,7 +10018,7 @@
           <a:bodyPr wrap="square" rtlCol="0" anchor="ctr"/>
           <a:lstStyle/>
           <a:p>
-            <a:pPr algn="ctr" indent="0" marL="0">
+            <a:pPr marL="0" indent="0" algn="ctr">
               <a:buNone/>
             </a:pPr>
             <a:r>
@@ -10299,7 +10057,7 @@
           <a:bodyPr wrap="square" rtlCol="0" anchor="ctr"/>
           <a:lstStyle/>
           <a:p>
-            <a:pPr indent="0" marL="0">
+            <a:pPr marL="0" indent="0">
               <a:buNone/>
             </a:pPr>
             <a:r>
@@ -10338,7 +10096,7 @@
           <a:bodyPr wrap="square" rtlCol="0" anchor="ctr"/>
           <a:lstStyle/>
           <a:p>
-            <a:pPr indent="0" marL="0">
+            <a:pPr marL="0" indent="0">
               <a:buNone/>
             </a:pPr>
             <a:r>
@@ -10424,7 +10182,7 @@
           <a:bodyPr wrap="square" rtlCol="0" anchor="ctr"/>
           <a:lstStyle/>
           <a:p>
-            <a:pPr algn="ctr" indent="0" marL="0">
+            <a:pPr marL="0" indent="0" algn="ctr">
               <a:buNone/>
             </a:pPr>
             <a:r>
@@ -10463,7 +10221,7 @@
           <a:bodyPr wrap="square" rtlCol="0" anchor="ctr"/>
           <a:lstStyle/>
           <a:p>
-            <a:pPr indent="0" marL="0">
+            <a:pPr marL="0" indent="0">
               <a:buNone/>
             </a:pPr>
             <a:r>
@@ -10502,7 +10260,7 @@
           <a:bodyPr wrap="square" rtlCol="0" anchor="ctr"/>
           <a:lstStyle/>
           <a:p>
-            <a:pPr indent="0" marL="0">
+            <a:pPr marL="0" indent="0">
               <a:buNone/>
             </a:pPr>
             <a:r>
@@ -10522,14 +10280,14 @@
       </p:sp>
       <p:pic>
         <p:nvPicPr>
-          <p:cNvPr id="36" name="Image 0" descr="deckimg/itpu_logo.png">    </p:cNvPr>
+          <p:cNvPr id="36" name="Image 0" descr="deckimg/itpu_logo.png"/>
           <p:cNvPicPr>
             <a:picLocks noChangeAspect="1"/>
           </p:cNvPicPr>
           <p:nvPr/>
         </p:nvPicPr>
         <p:blipFill>
-          <a:blip r:embed="rId1"/>
+          <a:blip r:embed="rId3"/>
           <a:stretch>
             <a:fillRect/>
           </a:stretch>
@@ -10565,7 +10323,7 @@
           <a:bodyPr wrap="square" rtlCol="0" anchor="ctr"/>
           <a:lstStyle/>
           <a:p>
-            <a:pPr indent="0" marL="0">
+            <a:pPr marL="0" indent="0">
               <a:buNone/>
             </a:pPr>
             <a:r>
@@ -10604,7 +10362,7 @@
           <a:bodyPr wrap="square" rtlCol="0" anchor="ctr"/>
           <a:lstStyle/>
           <a:p>
-            <a:pPr algn="r" indent="0" marL="0">
+            <a:pPr marL="0" indent="0" algn="r">
               <a:buNone/>
             </a:pPr>
             <a:r>
@@ -10638,6 +10396,7 @@
         <a:solidFill>
           <a:srgbClr val="263852"/>
         </a:solidFill>
+        <a:effectLst/>
       </p:bgPr>
     </p:bg>
     <p:spTree>
@@ -10695,11 +10454,11 @@
           <a:bodyPr wrap="square" rtlCol="0" anchor="ctr"/>
           <a:lstStyle/>
           <a:p>
-            <a:pPr indent="0" marL="0">
-              <a:buNone/>
-            </a:pPr>
-            <a:r>
-              <a:rPr lang="en-US" sz="1600" b="1" spc="400" kern="0" dirty="0">
+            <a:pPr marL="0" indent="0">
+              <a:buNone/>
+            </a:pPr>
+            <a:r>
+              <a:rPr lang="en-US" sz="1600" b="1" kern="0" spc="400" dirty="0">
                 <a:solidFill>
                   <a:srgbClr val="39C2D7"/>
                 </a:solidFill>
@@ -10734,7 +10493,7 @@
           <a:bodyPr wrap="square" rtlCol="0" anchor="ctr"/>
           <a:lstStyle/>
           <a:p>
-            <a:pPr indent="0" marL="0">
+            <a:pPr marL="0" indent="0">
               <a:buNone/>
             </a:pPr>
             <a:r>
@@ -10773,7 +10532,7 @@
           <a:bodyPr wrap="square" rtlCol="0" anchor="ctr"/>
           <a:lstStyle/>
           <a:p>
-            <a:pPr indent="0" marL="0">
+            <a:pPr marL="0" indent="0">
               <a:buNone/>
             </a:pPr>
             <a:r>
@@ -10793,14 +10552,14 @@
       </p:sp>
       <p:pic>
         <p:nvPicPr>
-          <p:cNvPr id="6" name="Image 0" descr="deckimg/itpu_logo.png">    </p:cNvPr>
+          <p:cNvPr id="6" name="Image 0" descr="deckimg/itpu_logo.png"/>
           <p:cNvPicPr>
             <a:picLocks noChangeAspect="1"/>
           </p:cNvPicPr>
           <p:nvPr/>
         </p:nvPicPr>
         <p:blipFill>
-          <a:blip r:embed="rId1"/>
+          <a:blip r:embed="rId3"/>
           <a:stretch>
             <a:fillRect/>
           </a:stretch>
@@ -10831,6 +10590,7 @@
         <a:solidFill>
           <a:srgbClr val="FFFFFF"/>
         </a:solidFill>
+        <a:effectLst/>
       </p:bgPr>
     </p:bg>
     <p:spTree>
@@ -10908,11 +10668,11 @@
           <a:bodyPr wrap="square" rtlCol="0" anchor="ctr"/>
           <a:lstStyle/>
           <a:p>
-            <a:pPr indent="0" marL="0">
-              <a:buNone/>
-            </a:pPr>
-            <a:r>
-              <a:rPr lang="en-US" sz="1200" b="1" spc="200" kern="0" dirty="0">
+            <a:pPr marL="0" indent="0">
+              <a:buNone/>
+            </a:pPr>
+            <a:r>
+              <a:rPr lang="en-US" sz="1200" b="1" kern="0" spc="200" dirty="0">
                 <a:solidFill>
                   <a:srgbClr val="39C2D7"/>
                 </a:solidFill>
@@ -10947,7 +10707,7 @@
           <a:bodyPr wrap="square" rtlCol="0" anchor="ctr"/>
           <a:lstStyle/>
           <a:p>
-            <a:pPr indent="0" marL="0">
+            <a:pPr marL="0" indent="0">
               <a:buNone/>
             </a:pPr>
             <a:r>
@@ -10994,14 +10754,14 @@
       </p:sp>
       <p:pic>
         <p:nvPicPr>
-          <p:cNvPr id="7" name="Image 0" descr="deckimg/mlprocess.png">    </p:cNvPr>
+          <p:cNvPr id="7" name="Image 0" descr="deckimg/mlprocess.png"/>
           <p:cNvPicPr>
             <a:picLocks noChangeAspect="1"/>
           </p:cNvPicPr>
           <p:nvPr/>
         </p:nvPicPr>
         <p:blipFill>
-          <a:blip r:embed="rId1"/>
+          <a:blip r:embed="rId3"/>
           <a:stretch>
             <a:fillRect/>
           </a:stretch>
@@ -11018,14 +10778,14 @@
       </p:pic>
       <p:pic>
         <p:nvPicPr>
-          <p:cNvPr id="8" name="Image 1" descr="deckimg/itpu_logo.png">    </p:cNvPr>
+          <p:cNvPr id="8" name="Image 1" descr="deckimg/itpu_logo.png"/>
           <p:cNvPicPr>
             <a:picLocks noChangeAspect="1"/>
           </p:cNvPicPr>
           <p:nvPr/>
         </p:nvPicPr>
         <p:blipFill>
-          <a:blip r:embed="rId2"/>
+          <a:blip r:embed="rId4"/>
           <a:stretch>
             <a:fillRect/>
           </a:stretch>
@@ -11061,7 +10821,7 @@
           <a:bodyPr wrap="square" rtlCol="0" anchor="ctr"/>
           <a:lstStyle/>
           <a:p>
-            <a:pPr indent="0" marL="0">
+            <a:pPr marL="0" indent="0">
               <a:buNone/>
             </a:pPr>
             <a:r>
@@ -11100,7 +10860,7 @@
           <a:bodyPr wrap="square" rtlCol="0" anchor="ctr"/>
           <a:lstStyle/>
           <a:p>
-            <a:pPr algn="r" indent="0" marL="0">
+            <a:pPr marL="0" indent="0" algn="r">
               <a:buNone/>
             </a:pPr>
             <a:r>
@@ -11134,6 +10894,7 @@
         <a:solidFill>
           <a:srgbClr val="FFFFFF"/>
         </a:solidFill>
+        <a:effectLst/>
       </p:bgPr>
     </p:bg>
     <p:spTree>
@@ -11211,11 +10972,11 @@
           <a:bodyPr wrap="square" rtlCol="0" anchor="ctr"/>
           <a:lstStyle/>
           <a:p>
-            <a:pPr indent="0" marL="0">
-              <a:buNone/>
-            </a:pPr>
-            <a:r>
-              <a:rPr lang="en-US" sz="1200" b="1" spc="200" kern="0" dirty="0">
+            <a:pPr marL="0" indent="0">
+              <a:buNone/>
+            </a:pPr>
+            <a:r>
+              <a:rPr lang="en-US" sz="1200" b="1" kern="0" spc="200" dirty="0">
                 <a:solidFill>
                   <a:srgbClr val="39C2D7"/>
                 </a:solidFill>
@@ -11250,7 +11011,7 @@
           <a:bodyPr wrap="square" rtlCol="0" anchor="ctr"/>
           <a:lstStyle/>
           <a:p>
-            <a:pPr indent="0" marL="0">
+            <a:pPr marL="0" indent="0">
               <a:buNone/>
             </a:pPr>
             <a:r>
@@ -11316,7 +11077,7 @@
           <a:bodyPr wrap="square" rtlCol="0" anchor="ctr"/>
           <a:lstStyle/>
           <a:p>
-            <a:pPr indent="0" marL="0">
+            <a:pPr marL="0" indent="0">
               <a:buNone/>
             </a:pPr>
             <a:r>
@@ -11355,7 +11116,7 @@
           <a:bodyPr wrap="square" rtlCol="0" anchor="ctr"/>
           <a:lstStyle/>
           <a:p>
-            <a:pPr indent="0" marL="0">
+            <a:pPr marL="0" indent="0">
               <a:buNone/>
             </a:pPr>
             <a:r>
@@ -11394,7 +11155,7 @@
           <a:bodyPr wrap="square" rtlCol="0" anchor="ctr"/>
           <a:lstStyle/>
           <a:p>
-            <a:pPr indent="0" marL="0">
+            <a:pPr marL="0" indent="0">
               <a:buNone/>
             </a:pPr>
             <a:r>
@@ -11408,9 +11169,6 @@
               </a:rPr>
               <a:t>examples:  </a:t>
             </a:r>
-            <a:pPr indent="0" marL="0">
-              <a:buNone/>
-            </a:pPr>
             <a:r>
               <a:rPr lang="en-US" sz="1300" b="1" dirty="0">
                 <a:solidFill>
@@ -11474,7 +11232,7 @@
           <a:bodyPr wrap="square" rtlCol="0" anchor="ctr"/>
           <a:lstStyle/>
           <a:p>
-            <a:pPr indent="0" marL="0">
+            <a:pPr marL="0" indent="0">
               <a:buNone/>
             </a:pPr>
             <a:r>
@@ -11513,7 +11271,7 @@
           <a:bodyPr wrap="square" rtlCol="0" anchor="ctr"/>
           <a:lstStyle/>
           <a:p>
-            <a:pPr indent="0" marL="0">
+            <a:pPr marL="0" indent="0">
               <a:buNone/>
             </a:pPr>
             <a:r>
@@ -11552,7 +11310,7 @@
           <a:bodyPr wrap="square" rtlCol="0" anchor="ctr"/>
           <a:lstStyle/>
           <a:p>
-            <a:pPr indent="0" marL="0">
+            <a:pPr marL="0" indent="0">
               <a:buNone/>
             </a:pPr>
             <a:r>
@@ -11566,9 +11324,6 @@
               </a:rPr>
               <a:t>examples:  </a:t>
             </a:r>
-            <a:pPr indent="0" marL="0">
-              <a:buNone/>
-            </a:pPr>
             <a:r>
               <a:rPr lang="en-US" sz="1300" b="1" dirty="0">
                 <a:solidFill>
@@ -11613,14 +11368,14 @@
       </p:sp>
       <p:pic>
         <p:nvPicPr>
-          <p:cNvPr id="15" name="Image 0" descr="deckimg/watch.png">    </p:cNvPr>
+          <p:cNvPr id="15" name="Image 0" descr="deckimg/watch.png"/>
           <p:cNvPicPr>
             <a:picLocks noChangeAspect="1"/>
           </p:cNvPicPr>
           <p:nvPr/>
         </p:nvPicPr>
         <p:blipFill>
-          <a:blip r:embed="rId1"/>
+          <a:blip r:embed="rId3"/>
           <a:stretch>
             <a:fillRect/>
           </a:stretch>
@@ -11656,7 +11411,7 @@
           <a:bodyPr wrap="square" rtlCol="0" anchor="ctr"/>
           <a:lstStyle/>
           <a:p>
-            <a:pPr algn="ctr" indent="0" marL="0">
+            <a:pPr marL="0" indent="0" algn="ctr">
               <a:buNone/>
             </a:pPr>
             <a:r>
@@ -11676,14 +11431,14 @@
       </p:sp>
       <p:pic>
         <p:nvPicPr>
-          <p:cNvPr id="17" name="Image 1" descr="deckimg/itpu_logo.png">    </p:cNvPr>
+          <p:cNvPr id="17" name="Image 1" descr="deckimg/itpu_logo.png"/>
           <p:cNvPicPr>
             <a:picLocks noChangeAspect="1"/>
           </p:cNvPicPr>
           <p:nvPr/>
         </p:nvPicPr>
         <p:blipFill>
-          <a:blip r:embed="rId2"/>
+          <a:blip r:embed="rId4"/>
           <a:stretch>
             <a:fillRect/>
           </a:stretch>
@@ -11719,7 +11474,7 @@
           <a:bodyPr wrap="square" rtlCol="0" anchor="ctr"/>
           <a:lstStyle/>
           <a:p>
-            <a:pPr indent="0" marL="0">
+            <a:pPr marL="0" indent="0">
               <a:buNone/>
             </a:pPr>
             <a:r>
@@ -11758,7 +11513,7 @@
           <a:bodyPr wrap="square" rtlCol="0" anchor="ctr"/>
           <a:lstStyle/>
           <a:p>
-            <a:pPr algn="r" indent="0" marL="0">
+            <a:pPr marL="0" indent="0" algn="r">
               <a:buNone/>
             </a:pPr>
             <a:r>
@@ -11792,6 +11547,7 @@
         <a:solidFill>
           <a:srgbClr val="FFFFFF"/>
         </a:solidFill>
+        <a:effectLst/>
       </p:bgPr>
     </p:bg>
     <p:spTree>
@@ -11869,11 +11625,11 @@
           <a:bodyPr wrap="square" rtlCol="0" anchor="ctr"/>
           <a:lstStyle/>
           <a:p>
-            <a:pPr indent="0" marL="0">
-              <a:buNone/>
-            </a:pPr>
-            <a:r>
-              <a:rPr lang="en-US" sz="1200" b="1" spc="200" kern="0" dirty="0">
+            <a:pPr marL="0" indent="0">
+              <a:buNone/>
+            </a:pPr>
+            <a:r>
+              <a:rPr lang="en-US" sz="1200" b="1" kern="0" spc="200" dirty="0">
                 <a:solidFill>
                   <a:srgbClr val="39C2D7"/>
                 </a:solidFill>
@@ -11908,7 +11664,7 @@
           <a:bodyPr wrap="square" rtlCol="0" anchor="ctr"/>
           <a:lstStyle/>
           <a:p>
-            <a:pPr indent="0" marL="0">
+            <a:pPr marL="0" indent="0">
               <a:buNone/>
             </a:pPr>
             <a:r>
@@ -11969,7 +11725,7 @@
           <a:bodyPr wrap="square" rtlCol="0" anchor="t"/>
           <a:lstStyle/>
           <a:p>
-            <a:pPr indent="0" marL="0">
+            <a:pPr marL="0" indent="0">
               <a:buNone/>
             </a:pPr>
             <a:r>
@@ -11982,71 +11738,59 @@
                 <a:cs typeface="Consolas" pitchFamily="34" charset="-120"/>
               </a:rPr>
               <a:t># model:  price = w * area + b
+w, b = 0.0, 0.0          # parameters (start random)
+lr = 0.1                 # hyperparameter (you set)
 </a:t>
             </a:r>
-            <a:pPr indent="0" marL="0">
-              <a:buNone/>
-            </a:pPr>
             <a:r>
               <a:rPr lang="en-US" sz="1300" dirty="0">
                 <a:solidFill>
-                  <a:srgbClr val="7FE3B0"/>
+                  <a:srgbClr val="D6E4FF"/>
                 </a:solidFill>
                 <a:latin typeface="Consolas" pitchFamily="34" charset="0"/>
                 <a:ea typeface="Consolas" pitchFamily="34" charset="-122"/>
                 <a:cs typeface="Consolas" pitchFamily="34" charset="-120"/>
               </a:rPr>
-              <a:t>w, b = 0.0, 0.0          # parameters (start random)
+              <a:t>
 </a:t>
             </a:r>
-            <a:pPr indent="0" marL="0">
-              <a:buNone/>
-            </a:pPr>
             <a:r>
               <a:rPr lang="en-US" sz="1300" dirty="0">
                 <a:solidFill>
-                  <a:srgbClr val="7FE3B0"/>
+                  <a:srgbClr val="F2B36B"/>
                 </a:solidFill>
                 <a:latin typeface="Consolas" pitchFamily="34" charset="0"/>
                 <a:ea typeface="Consolas" pitchFamily="34" charset="-122"/>
                 <a:cs typeface="Consolas" pitchFamily="34" charset="-120"/>
               </a:rPr>
-              <a:t>lr = 0.1                 # hyperparameter (you set)
+              <a:t>for step in range(300):
 </a:t>
             </a:r>
-            <a:pPr indent="0" marL="0">
-              <a:buNone/>
-            </a:pPr>
             <a:r>
               <a:rPr lang="en-US" sz="1300" dirty="0">
                 <a:solidFill>
-                  <a:srgbClr val="D6E4FF"/>
+                  <a:srgbClr val="7FE3B0"/>
                 </a:solidFill>
                 <a:latin typeface="Consolas" pitchFamily="34" charset="0"/>
                 <a:ea typeface="Consolas" pitchFamily="34" charset="-122"/>
                 <a:cs typeface="Consolas" pitchFamily="34" charset="-120"/>
               </a:rPr>
-              <a:t>
+              <a:t>    err   = (w*area_s + b) - price      # A. predict
+    grad_w = np.mean(2 * err * area_s)  # B. measure
 </a:t>
             </a:r>
-            <a:pPr indent="0" marL="0">
-              <a:buNone/>
-            </a:pPr>
             <a:r>
               <a:rPr lang="en-US" sz="1300" dirty="0">
                 <a:solidFill>
-                  <a:srgbClr val="F2B36B"/>
+                  <a:srgbClr val="D6E4FF"/>
                 </a:solidFill>
                 <a:latin typeface="Consolas" pitchFamily="34" charset="0"/>
                 <a:ea typeface="Consolas" pitchFamily="34" charset="-122"/>
                 <a:cs typeface="Consolas" pitchFamily="34" charset="-120"/>
               </a:rPr>
-              <a:t>for step in range(300):
+              <a:t>    grad_b = np.mean(2 * err)
 </a:t>
             </a:r>
-            <a:pPr indent="0" marL="0">
-              <a:buNone/>
-            </a:pPr>
             <a:r>
               <a:rPr lang="en-US" sz="1300" dirty="0">
                 <a:solidFill>
@@ -12056,87 +11800,21 @@
                 <a:ea typeface="Consolas" pitchFamily="34" charset="-122"/>
                 <a:cs typeface="Consolas" pitchFamily="34" charset="-120"/>
               </a:rPr>
-              <a:t>    err   = (w*area_s + b) - price      # A. predict
+              <a:t>    w -= lr * grad_w                    # C. adjust
 </a:t>
             </a:r>
-            <a:pPr indent="0" marL="0">
-              <a:buNone/>
-            </a:pPr>
             <a:r>
               <a:rPr lang="en-US" sz="1300" dirty="0">
                 <a:solidFill>
-                  <a:srgbClr val="7FE3B0"/>
+                  <a:srgbClr val="D6E4FF"/>
                 </a:solidFill>
                 <a:latin typeface="Consolas" pitchFamily="34" charset="0"/>
                 <a:ea typeface="Consolas" pitchFamily="34" charset="-122"/>
                 <a:cs typeface="Consolas" pitchFamily="34" charset="-120"/>
               </a:rPr>
-              <a:t>    grad_w = np.mean(2 * err * area_s)  # B. measure
-</a:t>
-            </a:r>
-            <a:pPr indent="0" marL="0">
-              <a:buNone/>
-            </a:pPr>
-            <a:r>
-              <a:rPr lang="en-US" sz="1300" dirty="0">
-                <a:solidFill>
-                  <a:srgbClr val="D6E4FF"/>
-                </a:solidFill>
-                <a:latin typeface="Consolas" pitchFamily="34" charset="0"/>
-                <a:ea typeface="Consolas" pitchFamily="34" charset="-122"/>
-                <a:cs typeface="Consolas" pitchFamily="34" charset="-120"/>
-              </a:rPr>
-              <a:t>    grad_b = np.mean(2 * err)
-</a:t>
-            </a:r>
-            <a:pPr indent="0" marL="0">
-              <a:buNone/>
-            </a:pPr>
-            <a:r>
-              <a:rPr lang="en-US" sz="1300" dirty="0">
-                <a:solidFill>
-                  <a:srgbClr val="7FE3B0"/>
-                </a:solidFill>
-                <a:latin typeface="Consolas" pitchFamily="34" charset="0"/>
-                <a:ea typeface="Consolas" pitchFamily="34" charset="-122"/>
-                <a:cs typeface="Consolas" pitchFamily="34" charset="-120"/>
-              </a:rPr>
-              <a:t>    w -= lr * grad_w                    # C. adjust
-</a:t>
-            </a:r>
-            <a:pPr indent="0" marL="0">
-              <a:buNone/>
-            </a:pPr>
-            <a:r>
-              <a:rPr lang="en-US" sz="1300" dirty="0">
-                <a:solidFill>
-                  <a:srgbClr val="D6E4FF"/>
-                </a:solidFill>
-                <a:latin typeface="Consolas" pitchFamily="34" charset="0"/>
-                <a:ea typeface="Consolas" pitchFamily="34" charset="-122"/>
-                <a:cs typeface="Consolas" pitchFamily="34" charset="-120"/>
-              </a:rPr>
               <a:t>    b -= lr * grad_b
 </a:t>
             </a:r>
-            <a:pPr indent="0" marL="0">
-              <a:buNone/>
-            </a:pPr>
-            <a:r>
-              <a:rPr lang="en-US" sz="1300" dirty="0">
-                <a:solidFill>
-                  <a:srgbClr val="D6E4FF"/>
-                </a:solidFill>
-                <a:latin typeface="Consolas" pitchFamily="34" charset="0"/>
-                <a:ea typeface="Consolas" pitchFamily="34" charset="-122"/>
-                <a:cs typeface="Consolas" pitchFamily="34" charset="-120"/>
-              </a:rPr>
-              <a:t>
-</a:t>
-            </a:r>
-            <a:pPr indent="0" marL="0">
-              <a:buNone/>
-            </a:pPr>
             <a:r>
               <a:rPr lang="en-US" sz="1300" dirty="0">
                 <a:solidFill>
@@ -12201,7 +11879,7 @@
           <a:bodyPr wrap="square" rtlCol="0" anchor="ctr"/>
           <a:lstStyle/>
           <a:p>
-            <a:pPr indent="0" marL="0">
+            <a:pPr marL="0" indent="0">
               <a:buNone/>
             </a:pPr>
             <a:r>
@@ -12267,7 +11945,7 @@
           <a:bodyPr wrap="square" rtlCol="0" anchor="ctr"/>
           <a:lstStyle/>
           <a:p>
-            <a:pPr indent="0" marL="0">
+            <a:pPr marL="0" indent="0">
               <a:buNone/>
             </a:pPr>
             <a:r>
@@ -12306,7 +11984,7 @@
           <a:bodyPr wrap="square" rtlCol="0" anchor="ctr"/>
           <a:lstStyle/>
           <a:p>
-            <a:pPr indent="0" marL="0">
+            <a:pPr marL="0" indent="0">
               <a:buNone/>
             </a:pPr>
             <a:r>
@@ -12372,7 +12050,7 @@
           <a:bodyPr wrap="square" rtlCol="0" anchor="ctr"/>
           <a:lstStyle/>
           <a:p>
-            <a:pPr indent="0" marL="0">
+            <a:pPr marL="0" indent="0">
               <a:buNone/>
             </a:pPr>
             <a:r>
@@ -12411,7 +12089,7 @@
           <a:bodyPr wrap="square" rtlCol="0" anchor="ctr"/>
           <a:lstStyle/>
           <a:p>
-            <a:pPr indent="0" marL="0">
+            <a:pPr marL="0" indent="0">
               <a:buNone/>
             </a:pPr>
             <a:r>
@@ -12477,7 +12155,7 @@
           <a:bodyPr wrap="square" rtlCol="0" anchor="ctr"/>
           <a:lstStyle/>
           <a:p>
-            <a:pPr indent="0" marL="0">
+            <a:pPr marL="0" indent="0">
               <a:buNone/>
             </a:pPr>
             <a:r>
@@ -12516,7 +12194,7 @@
           <a:bodyPr wrap="square" rtlCol="0" anchor="ctr"/>
           <a:lstStyle/>
           <a:p>
-            <a:pPr indent="0" marL="0">
+            <a:pPr marL="0" indent="0">
               <a:buNone/>
             </a:pPr>
             <a:r>
@@ -12582,7 +12260,7 @@
           <a:bodyPr wrap="square" rtlCol="0" anchor="ctr"/>
           <a:lstStyle/>
           <a:p>
-            <a:pPr indent="0" marL="0">
+            <a:pPr marL="0" indent="0">
               <a:buNone/>
             </a:pPr>
             <a:r>
@@ -12621,7 +12299,7 @@
           <a:bodyPr wrap="square" rtlCol="0" anchor="ctr"/>
           <a:lstStyle/>
           <a:p>
-            <a:pPr indent="0" marL="0">
+            <a:pPr marL="0" indent="0">
               <a:buNone/>
             </a:pPr>
             <a:r>
@@ -12641,14 +12319,14 @@
       </p:sp>
       <p:pic>
         <p:nvPicPr>
-          <p:cNvPr id="22" name="Image 0" descr="deckimg/itpu_logo.png">    </p:cNvPr>
+          <p:cNvPr id="22" name="Image 0" descr="deckimg/itpu_logo.png"/>
           <p:cNvPicPr>
             <a:picLocks noChangeAspect="1"/>
           </p:cNvPicPr>
           <p:nvPr/>
         </p:nvPicPr>
         <p:blipFill>
-          <a:blip r:embed="rId1"/>
+          <a:blip r:embed="rId3"/>
           <a:stretch>
             <a:fillRect/>
           </a:stretch>
@@ -12684,7 +12362,7 @@
           <a:bodyPr wrap="square" rtlCol="0" anchor="ctr"/>
           <a:lstStyle/>
           <a:p>
-            <a:pPr indent="0" marL="0">
+            <a:pPr marL="0" indent="0">
               <a:buNone/>
             </a:pPr>
             <a:r>
@@ -12723,7 +12401,7 @@
           <a:bodyPr wrap="square" rtlCol="0" anchor="ctr"/>
           <a:lstStyle/>
           <a:p>
-            <a:pPr algn="r" indent="0" marL="0">
+            <a:pPr marL="0" indent="0" algn="r">
               <a:buNone/>
             </a:pPr>
             <a:r>
@@ -12757,6 +12435,7 @@
         <a:solidFill>
           <a:srgbClr val="FFFFFF"/>
         </a:solidFill>
+        <a:effectLst/>
       </p:bgPr>
     </p:bg>
     <p:spTree>
@@ -12834,11 +12513,11 @@
           <a:bodyPr wrap="square" rtlCol="0" anchor="ctr"/>
           <a:lstStyle/>
           <a:p>
-            <a:pPr indent="0" marL="0">
-              <a:buNone/>
-            </a:pPr>
-            <a:r>
-              <a:rPr lang="en-US" sz="1200" b="1" spc="200" kern="0" dirty="0">
+            <a:pPr marL="0" indent="0">
+              <a:buNone/>
+            </a:pPr>
+            <a:r>
+              <a:rPr lang="en-US" sz="1200" b="1" kern="0" spc="200" dirty="0">
                 <a:solidFill>
                   <a:srgbClr val="39C2D7"/>
                 </a:solidFill>
@@ -12873,7 +12552,7 @@
           <a:bodyPr wrap="square" rtlCol="0" anchor="ctr"/>
           <a:lstStyle/>
           <a:p>
-            <a:pPr indent="0" marL="0">
+            <a:pPr marL="0" indent="0">
               <a:buNone/>
             </a:pPr>
             <a:r>
@@ -12939,7 +12618,7 @@
           <a:bodyPr wrap="square" rtlCol="0" anchor="ctr"/>
           <a:lstStyle/>
           <a:p>
-            <a:pPr indent="0" marL="0">
+            <a:pPr marL="0" indent="0">
               <a:buNone/>
             </a:pPr>
             <a:r>
@@ -13000,7 +12679,7 @@
           <a:bodyPr wrap="square" rtlCol="0" anchor="t"/>
           <a:lstStyle/>
           <a:p>
-            <a:pPr indent="0" marL="0">
+            <a:pPr marL="0" indent="0">
               <a:buNone/>
             </a:pPr>
             <a:r>
@@ -13015,9 +12694,6 @@
               <a:t>X_train, X_test, y_train, y_test = train_test_split(
 </a:t>
             </a:r>
-            <a:pPr indent="0" marL="0">
-              <a:buNone/>
-            </a:pPr>
             <a:r>
               <a:rPr lang="en-US" sz="1300" dirty="0">
                 <a:solidFill>
@@ -13030,124 +12706,43 @@
               <a:t>        X, y, test_size=0.3)
 </a:t>
             </a:r>
-            <a:pPr indent="0" marL="0">
-              <a:buNone/>
-            </a:pPr>
             <a:r>
               <a:rPr lang="en-US" sz="1300" dirty="0">
                 <a:solidFill>
-                  <a:srgbClr val="D6E4FF"/>
+                  <a:srgbClr val="F2B36B"/>
                 </a:solidFill>
                 <a:latin typeface="Consolas" pitchFamily="34" charset="0"/>
                 <a:ea typeface="Consolas" pitchFamily="34" charset="-122"/>
                 <a:cs typeface="Consolas" pitchFamily="34" charset="-120"/>
               </a:rPr>
-              <a:t>
+              <a:t>model.fit(X_train, y_train)
 </a:t>
             </a:r>
-            <a:pPr indent="0" marL="0">
-              <a:buNone/>
-            </a:pPr>
             <a:r>
               <a:rPr lang="en-US" sz="1300" dirty="0">
                 <a:solidFill>
-                  <a:srgbClr val="F2B36B"/>
+                  <a:srgbClr val="D6E4FF"/>
                 </a:solidFill>
                 <a:latin typeface="Consolas" pitchFamily="34" charset="0"/>
                 <a:ea typeface="Consolas" pitchFamily="34" charset="-122"/>
                 <a:cs typeface="Consolas" pitchFamily="34" charset="-120"/>
               </a:rPr>
-              <a:t>model.fit(X_train, y_train)
+              <a:t>
+train_acc = accuracy(y_train, model.predict(X_train))
+test_acc  = accuracy(y_test,  model.predict(X_test))
 </a:t>
             </a:r>
-            <a:pPr indent="0" marL="0">
-              <a:buNone/>
-            </a:pPr>
             <a:r>
               <a:rPr lang="en-US" sz="1300" dirty="0">
                 <a:solidFill>
-                  <a:srgbClr val="D6E4FF"/>
+                  <a:srgbClr val="7FE3B0"/>
                 </a:solidFill>
                 <a:latin typeface="Consolas" pitchFamily="34" charset="0"/>
                 <a:ea typeface="Consolas" pitchFamily="34" charset="-122"/>
                 <a:cs typeface="Consolas" pitchFamily="34" charset="-120"/>
               </a:rPr>
-              <a:t>
-</a:t>
-            </a:r>
-            <a:pPr indent="0" marL="0">
-              <a:buNone/>
-            </a:pPr>
-            <a:r>
-              <a:rPr lang="en-US" sz="1300" dirty="0">
-                <a:solidFill>
-                  <a:srgbClr val="D6E4FF"/>
-                </a:solidFill>
-                <a:latin typeface="Consolas" pitchFamily="34" charset="0"/>
-                <a:ea typeface="Consolas" pitchFamily="34" charset="-122"/>
-                <a:cs typeface="Consolas" pitchFamily="34" charset="-120"/>
-              </a:rPr>
-              <a:t>train_acc = accuracy(y_train, model.predict(X_train))
-</a:t>
-            </a:r>
-            <a:pPr indent="0" marL="0">
-              <a:buNone/>
-            </a:pPr>
-            <a:r>
-              <a:rPr lang="en-US" sz="1300" dirty="0">
-                <a:solidFill>
-                  <a:srgbClr val="D6E4FF"/>
-                </a:solidFill>
-                <a:latin typeface="Consolas" pitchFamily="34" charset="0"/>
-                <a:ea typeface="Consolas" pitchFamily="34" charset="-122"/>
-                <a:cs typeface="Consolas" pitchFamily="34" charset="-120"/>
-              </a:rPr>
-              <a:t>test_acc  = accuracy(y_test,  model.predict(X_test))
-</a:t>
-            </a:r>
-            <a:pPr indent="0" marL="0">
-              <a:buNone/>
-            </a:pPr>
-            <a:r>
-              <a:rPr lang="en-US" sz="1300" dirty="0">
-                <a:solidFill>
-                  <a:srgbClr val="D6E4FF"/>
-                </a:solidFill>
-                <a:latin typeface="Consolas" pitchFamily="34" charset="0"/>
-                <a:ea typeface="Consolas" pitchFamily="34" charset="-122"/>
-                <a:cs typeface="Consolas" pitchFamily="34" charset="-120"/>
-              </a:rPr>
-              <a:t>
-</a:t>
-            </a:r>
-            <a:pPr indent="0" marL="0">
-              <a:buNone/>
-            </a:pPr>
-            <a:r>
-              <a:rPr lang="en-US" sz="1300" dirty="0">
-                <a:solidFill>
-                  <a:srgbClr val="7FE3B0"/>
-                </a:solidFill>
-                <a:latin typeface="Consolas" pitchFamily="34" charset="0"/>
-                <a:ea typeface="Consolas" pitchFamily="34" charset="-122"/>
-                <a:cs typeface="Consolas" pitchFamily="34" charset="-120"/>
-              </a:rPr>
               <a:t># Training accuracy: 100%
-</a:t>
-            </a:r>
-            <a:pPr indent="0" marL="0">
-              <a:buNone/>
-            </a:pPr>
-            <a:r>
-              <a:rPr lang="en-US" sz="1300" dirty="0">
-                <a:solidFill>
-                  <a:srgbClr val="7FE3B0"/>
-                </a:solidFill>
-                <a:latin typeface="Consolas" pitchFamily="34" charset="0"/>
-                <a:ea typeface="Consolas" pitchFamily="34" charset="-122"/>
-                <a:cs typeface="Consolas" pitchFamily="34" charset="-120"/>
-              </a:rPr>
-              <a:t># Test accuracy:      84%   &lt;- the GAP = overfitting
+# Test accuracy:      84%   &lt;- the GAP = overfitting
 </a:t>
             </a:r>
             <a:endParaRPr lang="en-US" sz="1300" dirty="0"/>
@@ -13202,7 +12797,7 @@
           <a:bodyPr wrap="square" rtlCol="0" anchor="ctr"/>
           <a:lstStyle/>
           <a:p>
-            <a:pPr indent="0" marL="0">
+            <a:pPr marL="0" indent="0">
               <a:buNone/>
             </a:pPr>
             <a:r>
@@ -13241,7 +12836,7 @@
           <a:bodyPr wrap="square" rtlCol="0" anchor="ctr"/>
           <a:lstStyle/>
           <a:p>
-            <a:pPr indent="0" marL="0">
+            <a:pPr marL="0" indent="0">
               <a:buNone/>
             </a:pPr>
             <a:r>
@@ -13258,13 +12853,13 @@
             <a:endParaRPr lang="en-US" sz="1300" dirty="0"/>
           </a:p>
           <a:p>
-            <a:pPr indent="0" marL="0">
+            <a:pPr marL="0" indent="0">
               <a:buNone/>
             </a:pPr>
             <a:endParaRPr lang="en-US" sz="1300" dirty="0"/>
           </a:p>
           <a:p>
-            <a:pPr indent="0" marL="0">
+            <a:pPr marL="0" indent="0">
               <a:buNone/>
             </a:pPr>
             <a:r>
@@ -13284,14 +12879,14 @@
       </p:sp>
       <p:pic>
         <p:nvPicPr>
-          <p:cNvPr id="13" name="Image 0" descr="deckimg/itpu_logo.png">    </p:cNvPr>
+          <p:cNvPr id="13" name="Image 0" descr="deckimg/itpu_logo.png"/>
           <p:cNvPicPr>
             <a:picLocks noChangeAspect="1"/>
           </p:cNvPicPr>
           <p:nvPr/>
         </p:nvPicPr>
         <p:blipFill>
-          <a:blip r:embed="rId1"/>
+          <a:blip r:embed="rId3"/>
           <a:stretch>
             <a:fillRect/>
           </a:stretch>
@@ -13327,7 +12922,7 @@
           <a:bodyPr wrap="square" rtlCol="0" anchor="ctr"/>
           <a:lstStyle/>
           <a:p>
-            <a:pPr indent="0" marL="0">
+            <a:pPr marL="0" indent="0">
               <a:buNone/>
             </a:pPr>
             <a:r>
@@ -13366,7 +12961,7 @@
           <a:bodyPr wrap="square" rtlCol="0" anchor="ctr"/>
           <a:lstStyle/>
           <a:p>
-            <a:pPr algn="r" indent="0" marL="0">
+            <a:pPr marL="0" indent="0" algn="r">
               <a:buNone/>
             </a:pPr>
             <a:r>
@@ -13400,6 +12995,7 @@
         <a:solidFill>
           <a:srgbClr val="FFFFFF"/>
         </a:solidFill>
+        <a:effectLst/>
       </p:bgPr>
     </p:bg>
     <p:spTree>
@@ -13477,11 +13073,11 @@
           <a:bodyPr wrap="square" rtlCol="0" anchor="ctr"/>
           <a:lstStyle/>
           <a:p>
-            <a:pPr indent="0" marL="0">
-              <a:buNone/>
-            </a:pPr>
-            <a:r>
-              <a:rPr lang="en-US" sz="1200" b="1" spc="200" kern="0" dirty="0">
+            <a:pPr marL="0" indent="0">
+              <a:buNone/>
+            </a:pPr>
+            <a:r>
+              <a:rPr lang="en-US" sz="1200" b="1" kern="0" spc="200" dirty="0">
                 <a:solidFill>
                   <a:srgbClr val="39C2D7"/>
                 </a:solidFill>
@@ -13516,7 +13112,7 @@
           <a:bodyPr wrap="square" rtlCol="0" anchor="ctr"/>
           <a:lstStyle/>
           <a:p>
-            <a:pPr indent="0" marL="0">
+            <a:pPr marL="0" indent="0">
               <a:buNone/>
             </a:pPr>
             <a:r>
@@ -13563,14 +13159,14 @@
       </p:sp>
       <p:pic>
         <p:nvPicPr>
-          <p:cNvPr id="7" name="Image 0" descr="deckimg/bias.png">    </p:cNvPr>
+          <p:cNvPr id="7" name="Image 0" descr="deckimg/bias.png"/>
           <p:cNvPicPr>
             <a:picLocks noChangeAspect="1"/>
           </p:cNvPicPr>
           <p:nvPr/>
         </p:nvPicPr>
         <p:blipFill>
-          <a:blip r:embed="rId1"/>
+          <a:blip r:embed="rId3"/>
           <a:stretch>
             <a:fillRect/>
           </a:stretch>
@@ -13633,7 +13229,7 @@
           <a:bodyPr wrap="square" rtlCol="0" anchor="ctr"/>
           <a:lstStyle/>
           <a:p>
-            <a:pPr indent="0" marL="0">
+            <a:pPr marL="0" indent="0">
               <a:buNone/>
             </a:pPr>
             <a:r>
@@ -13672,7 +13268,7 @@
           <a:bodyPr wrap="square" rtlCol="0" anchor="ctr"/>
           <a:lstStyle/>
           <a:p>
-            <a:pPr indent="0" marL="0">
+            <a:pPr marL="0" indent="0">
               <a:buNone/>
             </a:pPr>
             <a:r>
@@ -13738,7 +13334,7 @@
           <a:bodyPr wrap="square" rtlCol="0" anchor="ctr"/>
           <a:lstStyle/>
           <a:p>
-            <a:pPr indent="0" marL="0">
+            <a:pPr marL="0" indent="0">
               <a:buNone/>
             </a:pPr>
             <a:r>
@@ -13777,7 +13373,7 @@
           <a:bodyPr wrap="square" rtlCol="0" anchor="ctr"/>
           <a:lstStyle/>
           <a:p>
-            <a:pPr indent="0" marL="0">
+            <a:pPr marL="0" indent="0">
               <a:buNone/>
             </a:pPr>
             <a:r>
@@ -13843,7 +13439,7 @@
           <a:bodyPr wrap="square" rtlCol="0" anchor="ctr"/>
           <a:lstStyle/>
           <a:p>
-            <a:pPr indent="0" marL="0">
+            <a:pPr marL="0" indent="0">
               <a:buNone/>
             </a:pPr>
             <a:r>
@@ -13882,7 +13478,7 @@
           <a:bodyPr wrap="square" rtlCol="0" anchor="ctr"/>
           <a:lstStyle/>
           <a:p>
-            <a:pPr indent="0" marL="0">
+            <a:pPr marL="0" indent="0">
               <a:buNone/>
             </a:pPr>
             <a:r>
@@ -13902,14 +13498,14 @@
       </p:sp>
       <p:pic>
         <p:nvPicPr>
-          <p:cNvPr id="17" name="Image 1" descr="deckimg/itpu_logo.png">    </p:cNvPr>
+          <p:cNvPr id="17" name="Image 1" descr="deckimg/itpu_logo.png"/>
           <p:cNvPicPr>
             <a:picLocks noChangeAspect="1"/>
           </p:cNvPicPr>
           <p:nvPr/>
         </p:nvPicPr>
         <p:blipFill>
-          <a:blip r:embed="rId2"/>
+          <a:blip r:embed="rId4"/>
           <a:stretch>
             <a:fillRect/>
           </a:stretch>
@@ -13945,7 +13541,7 @@
           <a:bodyPr wrap="square" rtlCol="0" anchor="ctr"/>
           <a:lstStyle/>
           <a:p>
-            <a:pPr indent="0" marL="0">
+            <a:pPr marL="0" indent="0">
               <a:buNone/>
             </a:pPr>
             <a:r>
@@ -13984,7 +13580,7 @@
           <a:bodyPr wrap="square" rtlCol="0" anchor="ctr"/>
           <a:lstStyle/>
           <a:p>
-            <a:pPr algn="r" indent="0" marL="0">
+            <a:pPr marL="0" indent="0" algn="r">
               <a:buNone/>
             </a:pPr>
             <a:r>
@@ -14018,6 +13614,7 @@
         <a:solidFill>
           <a:srgbClr val="FFFFFF"/>
         </a:solidFill>
+        <a:effectLst/>
       </p:bgPr>
     </p:bg>
     <p:spTree>
@@ -14095,11 +13692,11 @@
           <a:bodyPr wrap="square" rtlCol="0" anchor="ctr"/>
           <a:lstStyle/>
           <a:p>
-            <a:pPr indent="0" marL="0">
-              <a:buNone/>
-            </a:pPr>
-            <a:r>
-              <a:rPr lang="en-US" sz="1200" b="1" spc="200" kern="0" dirty="0">
+            <a:pPr marL="0" indent="0">
+              <a:buNone/>
+            </a:pPr>
+            <a:r>
+              <a:rPr lang="en-US" sz="1200" b="1" kern="0" spc="200" dirty="0">
                 <a:solidFill>
                   <a:srgbClr val="39C2D7"/>
                 </a:solidFill>
@@ -14134,7 +13731,7 @@
           <a:bodyPr wrap="square" rtlCol="0" anchor="ctr"/>
           <a:lstStyle/>
           <a:p>
-            <a:pPr indent="0" marL="0">
+            <a:pPr marL="0" indent="0">
               <a:buNone/>
             </a:pPr>
             <a:r>
@@ -14181,14 +13778,14 @@
       </p:sp>
       <p:pic>
         <p:nvPicPr>
-          <p:cNvPr id="7" name="Image 0" descr="deckimg/shap-diagram.png">    </p:cNvPr>
+          <p:cNvPr id="7" name="Image 0" descr="deckimg/shap-diagram.png"/>
           <p:cNvPicPr>
             <a:picLocks noChangeAspect="1"/>
           </p:cNvPicPr>
           <p:nvPr/>
         </p:nvPicPr>
         <p:blipFill>
-          <a:blip r:embed="rId1"/>
+          <a:blip r:embed="rId3"/>
           <a:stretch>
             <a:fillRect/>
           </a:stretch>
@@ -14251,7 +13848,7 @@
           <a:bodyPr wrap="square" rtlCol="0" anchor="ctr"/>
           <a:lstStyle/>
           <a:p>
-            <a:pPr indent="0" marL="0">
+            <a:pPr marL="0" indent="0">
               <a:buNone/>
             </a:pPr>
             <a:r>
@@ -14290,7 +13887,7 @@
           <a:bodyPr wrap="square" rtlCol="0" anchor="ctr"/>
           <a:lstStyle/>
           <a:p>
-            <a:pPr indent="0" marL="0">
+            <a:pPr marL="0" indent="0">
               <a:buNone/>
             </a:pPr>
             <a:r>
@@ -14329,7 +13926,7 @@
           <a:bodyPr wrap="square" rtlCol="0" anchor="ctr"/>
           <a:lstStyle/>
           <a:p>
-            <a:pPr indent="0" marL="0">
+            <a:pPr marL="0" indent="0">
               <a:buNone/>
             </a:pPr>
             <a:r>
@@ -14368,7 +13965,7 @@
           <a:bodyPr wrap="square" rtlCol="0" anchor="ctr"/>
           <a:lstStyle/>
           <a:p>
-            <a:pPr indent="0" marL="0">
+            <a:pPr marL="0" indent="0">
               <a:buNone/>
             </a:pPr>
             <a:r>
@@ -14407,7 +14004,7 @@
           <a:bodyPr wrap="square" rtlCol="0" anchor="ctr"/>
           <a:lstStyle/>
           <a:p>
-            <a:pPr indent="0" marL="0">
+            <a:pPr marL="0" indent="0">
               <a:buNone/>
             </a:pPr>
             <a:r>
@@ -14427,14 +14024,14 @@
       </p:sp>
       <p:pic>
         <p:nvPicPr>
-          <p:cNvPr id="14" name="Image 1" descr="deckimg/itpu_logo.png">    </p:cNvPr>
+          <p:cNvPr id="14" name="Image 1" descr="deckimg/itpu_logo.png"/>
           <p:cNvPicPr>
             <a:picLocks noChangeAspect="1"/>
           </p:cNvPicPr>
           <p:nvPr/>
         </p:nvPicPr>
         <p:blipFill>
-          <a:blip r:embed="rId2"/>
+          <a:blip r:embed="rId4"/>
           <a:stretch>
             <a:fillRect/>
           </a:stretch>
@@ -14470,7 +14067,7 @@
           <a:bodyPr wrap="square" rtlCol="0" anchor="ctr"/>
           <a:lstStyle/>
           <a:p>
-            <a:pPr indent="0" marL="0">
+            <a:pPr marL="0" indent="0">
               <a:buNone/>
             </a:pPr>
             <a:r>
@@ -14509,7 +14106,7 @@
           <a:bodyPr wrap="square" rtlCol="0" anchor="ctr"/>
           <a:lstStyle/>
           <a:p>
-            <a:pPr algn="r" indent="0" marL="0">
+            <a:pPr marL="0" indent="0" algn="r">
               <a:buNone/>
             </a:pPr>
             <a:r>
@@ -14828,4 +14425,319 @@
     </a:ext>
   </a:extLst>
 </a:theme>
+</file>
+
+<file path=ppt/theme/theme2.xml><?xml version="1.0" encoding="utf-8"?>
+<a:theme xmlns:a="http://schemas.openxmlformats.org/drawingml/2006/main" name="Office Theme">
+  <a:themeElements>
+    <a:clrScheme name="Office">
+      <a:dk1>
+        <a:sysClr val="windowText" lastClr="000000"/>
+      </a:dk1>
+      <a:lt1>
+        <a:sysClr val="window" lastClr="FFFFFF"/>
+      </a:lt1>
+      <a:dk2>
+        <a:srgbClr val="0E2841"/>
+      </a:dk2>
+      <a:lt2>
+        <a:srgbClr val="E8E8E8"/>
+      </a:lt2>
+      <a:accent1>
+        <a:srgbClr val="156082"/>
+      </a:accent1>
+      <a:accent2>
+        <a:srgbClr val="E97132"/>
+      </a:accent2>
+      <a:accent3>
+        <a:srgbClr val="196B24"/>
+      </a:accent3>
+      <a:accent4>
+        <a:srgbClr val="0F9ED5"/>
+      </a:accent4>
+      <a:accent5>
+        <a:srgbClr val="A02B93"/>
+      </a:accent5>
+      <a:accent6>
+        <a:srgbClr val="4EA72E"/>
+      </a:accent6>
+      <a:hlink>
+        <a:srgbClr val="467886"/>
+      </a:hlink>
+      <a:folHlink>
+        <a:srgbClr val="96607D"/>
+      </a:folHlink>
+    </a:clrScheme>
+    <a:fontScheme name="Office">
+      <a:majorFont>
+        <a:latin typeface="Aptos Display" panose="02110004020202020204"/>
+        <a:ea typeface=""/>
+        <a:cs typeface=""/>
+        <a:font script="Jpan" typeface="游ゴシック Light"/>
+        <a:font script="Hang" typeface="맑은 고딕"/>
+        <a:font script="Hans" typeface="等线 Light"/>
+        <a:font script="Hant" typeface="新細明體"/>
+        <a:font script="Arab" typeface="Times New Roman"/>
+        <a:font script="Hebr" typeface="Times New Roman"/>
+        <a:font script="Thai" typeface="Angsana New"/>
+        <a:font script="Ethi" typeface="Nyala"/>
+        <a:font script="Beng" typeface="Vrinda"/>
+        <a:font script="Gujr" typeface="Shruti"/>
+        <a:font script="Khmr" typeface="MoolBoran"/>
+        <a:font script="Knda" typeface="Tunga"/>
+        <a:font script="Guru" typeface="Raavi"/>
+        <a:font script="Cans" typeface="Euphemia"/>
+        <a:font script="Cher" typeface="Plantagenet Cherokee"/>
+        <a:font script="Yiii" typeface="Microsoft Yi Baiti"/>
+        <a:font script="Tibt" typeface="Microsoft Himalaya"/>
+        <a:font script="Thaa" typeface="MV Boli"/>
+        <a:font script="Deva" typeface="Mangal"/>
+        <a:font script="Telu" typeface="Gautami"/>
+        <a:font script="Taml" typeface="Latha"/>
+        <a:font script="Syrc" typeface="Estrangelo Edessa"/>
+        <a:font script="Orya" typeface="Kalinga"/>
+        <a:font script="Mlym" typeface="Kartika"/>
+        <a:font script="Laoo" typeface="DokChampa"/>
+        <a:font script="Sinh" typeface="Iskoola Pota"/>
+        <a:font script="Mong" typeface="Mongolian Baiti"/>
+        <a:font script="Viet" typeface="Times New Roman"/>
+        <a:font script="Uigh" typeface="Microsoft Uighur"/>
+        <a:font script="Geor" typeface="Sylfaen"/>
+        <a:font script="Armn" typeface="Arial"/>
+        <a:font script="Bugi" typeface="Leelawadee UI"/>
+        <a:font script="Bopo" typeface="Microsoft JhengHei"/>
+        <a:font script="Java" typeface="Javanese Text"/>
+        <a:font script="Lisu" typeface="Segoe UI"/>
+        <a:font script="Mymr" typeface="Myanmar Text"/>
+        <a:font script="Nkoo" typeface="Ebrima"/>
+        <a:font script="Olck" typeface="Nirmala UI"/>
+        <a:font script="Osma" typeface="Ebrima"/>
+        <a:font script="Phag" typeface="Phagspa"/>
+        <a:font script="Syrn" typeface="Estrangelo Edessa"/>
+        <a:font script="Syrj" typeface="Estrangelo Edessa"/>
+        <a:font script="Syre" typeface="Estrangelo Edessa"/>
+        <a:font script="Sora" typeface="Nirmala UI"/>
+        <a:font script="Tale" typeface="Microsoft Tai Le"/>
+        <a:font script="Talu" typeface="Microsoft New Tai Lue"/>
+        <a:font script="Tfng" typeface="Ebrima"/>
+      </a:majorFont>
+      <a:minorFont>
+        <a:latin typeface="Aptos" panose="02110004020202020204"/>
+        <a:ea typeface=""/>
+        <a:cs typeface=""/>
+        <a:font script="Jpan" typeface="游ゴシック"/>
+        <a:font script="Hang" typeface="맑은 고딕"/>
+        <a:font script="Hans" typeface="等线"/>
+        <a:font script="Hant" typeface="新細明體"/>
+        <a:font script="Arab" typeface="Arial"/>
+        <a:font script="Hebr" typeface="Arial"/>
+        <a:font script="Thai" typeface="Cordia New"/>
+        <a:font script="Ethi" typeface="Nyala"/>
+        <a:font script="Beng" typeface="Vrinda"/>
+        <a:font script="Gujr" typeface="Shruti"/>
+        <a:font script="Khmr" typeface="DaunPenh"/>
+        <a:font script="Knda" typeface="Tunga"/>
+        <a:font script="Guru" typeface="Raavi"/>
+        <a:font script="Cans" typeface="Euphemia"/>
+        <a:font script="Cher" typeface="Plantagenet Cherokee"/>
+        <a:font script="Yiii" typeface="Microsoft Yi Baiti"/>
+        <a:font script="Tibt" typeface="Microsoft Himalaya"/>
+        <a:font script="Thaa" typeface="MV Boli"/>
+        <a:font script="Deva" typeface="Mangal"/>
+        <a:font script="Telu" typeface="Gautami"/>
+        <a:font script="Taml" typeface="Latha"/>
+        <a:font script="Syrc" typeface="Estrangelo Edessa"/>
+        <a:font script="Orya" typeface="Kalinga"/>
+        <a:font script="Mlym" typeface="Kartika"/>
+        <a:font script="Laoo" typeface="DokChampa"/>
+        <a:font script="Sinh" typeface="Iskoola Pota"/>
+        <a:font script="Mong" typeface="Mongolian Baiti"/>
+        <a:font script="Viet" typeface="Arial"/>
+        <a:font script="Uigh" typeface="Microsoft Uighur"/>
+        <a:font script="Geor" typeface="Sylfaen"/>
+        <a:font script="Armn" typeface="Arial"/>
+        <a:font script="Bugi" typeface="Leelawadee UI"/>
+        <a:font script="Bopo" typeface="Microsoft JhengHei"/>
+        <a:font script="Java" typeface="Javanese Text"/>
+        <a:font script="Lisu" typeface="Segoe UI"/>
+        <a:font script="Mymr" typeface="Myanmar Text"/>
+        <a:font script="Nkoo" typeface="Ebrima"/>
+        <a:font script="Olck" typeface="Nirmala UI"/>
+        <a:font script="Osma" typeface="Ebrima"/>
+        <a:font script="Phag" typeface="Phagspa"/>
+        <a:font script="Syrn" typeface="Estrangelo Edessa"/>
+        <a:font script="Syrj" typeface="Estrangelo Edessa"/>
+        <a:font script="Syre" typeface="Estrangelo Edessa"/>
+        <a:font script="Sora" typeface="Nirmala UI"/>
+        <a:font script="Tale" typeface="Microsoft Tai Le"/>
+        <a:font script="Talu" typeface="Microsoft New Tai Lue"/>
+        <a:font script="Tfng" typeface="Ebrima"/>
+      </a:minorFont>
+    </a:fontScheme>
+    <a:fmtScheme name="Office">
+      <a:fillStyleLst>
+        <a:solidFill>
+          <a:schemeClr val="phClr"/>
+        </a:solidFill>
+        <a:gradFill rotWithShape="1">
+          <a:gsLst>
+            <a:gs pos="0">
+              <a:schemeClr val="phClr">
+                <a:lumMod val="110000"/>
+                <a:satMod val="105000"/>
+                <a:tint val="67000"/>
+              </a:schemeClr>
+            </a:gs>
+            <a:gs pos="50000">
+              <a:schemeClr val="phClr">
+                <a:lumMod val="105000"/>
+                <a:satMod val="103000"/>
+                <a:tint val="73000"/>
+              </a:schemeClr>
+            </a:gs>
+            <a:gs pos="100000">
+              <a:schemeClr val="phClr">
+                <a:lumMod val="105000"/>
+                <a:satMod val="109000"/>
+                <a:tint val="81000"/>
+              </a:schemeClr>
+            </a:gs>
+          </a:gsLst>
+          <a:lin ang="5400000" scaled="0"/>
+        </a:gradFill>
+        <a:gradFill rotWithShape="1">
+          <a:gsLst>
+            <a:gs pos="0">
+              <a:schemeClr val="phClr">
+                <a:satMod val="103000"/>
+                <a:lumMod val="102000"/>
+                <a:tint val="94000"/>
+              </a:schemeClr>
+            </a:gs>
+            <a:gs pos="50000">
+              <a:schemeClr val="phClr">
+                <a:satMod val="110000"/>
+                <a:lumMod val="100000"/>
+                <a:shade val="100000"/>
+              </a:schemeClr>
+            </a:gs>
+            <a:gs pos="100000">
+              <a:schemeClr val="phClr">
+                <a:lumMod val="99000"/>
+                <a:satMod val="120000"/>
+                <a:shade val="78000"/>
+              </a:schemeClr>
+            </a:gs>
+          </a:gsLst>
+          <a:lin ang="5400000" scaled="0"/>
+        </a:gradFill>
+      </a:fillStyleLst>
+      <a:lnStyleLst>
+        <a:ln w="12700" cap="flat" cmpd="sng" algn="ctr">
+          <a:solidFill>
+            <a:schemeClr val="phClr"/>
+          </a:solidFill>
+          <a:prstDash val="solid"/>
+          <a:miter lim="800000"/>
+        </a:ln>
+        <a:ln w="19050" cap="flat" cmpd="sng" algn="ctr">
+          <a:solidFill>
+            <a:schemeClr val="phClr"/>
+          </a:solidFill>
+          <a:prstDash val="solid"/>
+          <a:miter lim="800000"/>
+        </a:ln>
+        <a:ln w="25400" cap="flat" cmpd="sng" algn="ctr">
+          <a:solidFill>
+            <a:schemeClr val="phClr"/>
+          </a:solidFill>
+          <a:prstDash val="solid"/>
+          <a:miter lim="800000"/>
+        </a:ln>
+      </a:lnStyleLst>
+      <a:effectStyleLst>
+        <a:effectStyle>
+          <a:effectLst/>
+        </a:effectStyle>
+        <a:effectStyle>
+          <a:effectLst/>
+        </a:effectStyle>
+        <a:effectStyle>
+          <a:effectLst>
+            <a:outerShdw blurRad="57150" dist="19050" dir="5400000" algn="ctr" rotWithShape="0">
+              <a:srgbClr val="000000">
+                <a:alpha val="63000"/>
+              </a:srgbClr>
+            </a:outerShdw>
+          </a:effectLst>
+        </a:effectStyle>
+      </a:effectStyleLst>
+      <a:bgFillStyleLst>
+        <a:solidFill>
+          <a:schemeClr val="phClr"/>
+        </a:solidFill>
+        <a:solidFill>
+          <a:schemeClr val="phClr">
+            <a:tint val="95000"/>
+            <a:satMod val="170000"/>
+          </a:schemeClr>
+        </a:solidFill>
+        <a:gradFill rotWithShape="1">
+          <a:gsLst>
+            <a:gs pos="0">
+              <a:schemeClr val="phClr">
+                <a:tint val="93000"/>
+                <a:satMod val="150000"/>
+                <a:shade val="98000"/>
+                <a:lumMod val="102000"/>
+              </a:schemeClr>
+            </a:gs>
+            <a:gs pos="50000">
+              <a:schemeClr val="phClr">
+                <a:tint val="98000"/>
+                <a:satMod val="130000"/>
+                <a:shade val="90000"/>
+                <a:lumMod val="103000"/>
+              </a:schemeClr>
+            </a:gs>
+            <a:gs pos="100000">
+              <a:schemeClr val="phClr">
+                <a:shade val="63000"/>
+                <a:satMod val="120000"/>
+              </a:schemeClr>
+            </a:gs>
+          </a:gsLst>
+          <a:lin ang="5400000" scaled="0"/>
+        </a:gradFill>
+      </a:bgFillStyleLst>
+    </a:fmtScheme>
+  </a:themeElements>
+  <a:objectDefaults>
+    <a:lnDef>
+      <a:spPr/>
+      <a:bodyPr/>
+      <a:lstStyle/>
+      <a:style>
+        <a:lnRef idx="2">
+          <a:schemeClr val="accent1"/>
+        </a:lnRef>
+        <a:fillRef idx="0">
+          <a:schemeClr val="accent1"/>
+        </a:fillRef>
+        <a:effectRef idx="1">
+          <a:schemeClr val="accent1"/>
+        </a:effectRef>
+        <a:fontRef idx="minor">
+          <a:schemeClr val="tx1"/>
+        </a:fontRef>
+      </a:style>
+    </a:lnDef>
+  </a:objectDefaults>
+  <a:extraClrSchemeLst/>
+  <a:extLst>
+    <a:ext uri="{05A4C25C-085E-4340-85A3-A5531E510DB2}">
+      <thm15:themeFamily xmlns:thm15="http://schemas.microsoft.com/office/thememl/2012/main" name="Office Theme" id="{2E142A2C-CD16-42D6-873A-C26D2A0506FA}" vid="{1BDDFF52-6CD6-40A5-AB3C-68EB2F1E4D0A}"/>
+    </a:ext>
+  </a:extLst>
+</a:theme>
 </file>